--- a/2026_М_ПІ_ІПЗм_24_1_Суботін_В_А.pptx
+++ b/2026_М_ПІ_ІПЗм_24_1_Суботін_В_А.pptx
@@ -8499,39 +8499,11 @@
               <a:t>рекомендаційних</a:t>
             </a:r>
             <a:r>
-              <a:rPr lang="ru-RU" sz="2400" dirty="0">
-                <a:latin typeface="Times New Roman" panose="02020603050405020304" pitchFamily="18" charset="0"/>
-                <a:cs typeface="Times New Roman" panose="02020603050405020304" pitchFamily="18" charset="0"/>
-              </a:rPr>
-              <a:t> системах з метою </a:t>
-            </a:r>
-            <a:r>
-              <a:rPr lang="ru-RU" sz="2400" dirty="0" err="1">
-                <a:latin typeface="Times New Roman" panose="02020603050405020304" pitchFamily="18" charset="0"/>
-                <a:cs typeface="Times New Roman" panose="02020603050405020304" pitchFamily="18" charset="0"/>
-              </a:rPr>
-              <a:t>визначення</a:t>
-            </a:r>
-            <a:r>
-              <a:rPr lang="ru-RU" sz="2400" dirty="0">
-                <a:latin typeface="Times New Roman" panose="02020603050405020304" pitchFamily="18" charset="0"/>
-                <a:cs typeface="Times New Roman" panose="02020603050405020304" pitchFamily="18" charset="0"/>
-              </a:rPr>
-              <a:t> </a:t>
-            </a:r>
-            <a:r>
-              <a:rPr lang="ru-RU" sz="2400" dirty="0" err="1">
-                <a:latin typeface="Times New Roman" panose="02020603050405020304" pitchFamily="18" charset="0"/>
-                <a:cs typeface="Times New Roman" panose="02020603050405020304" pitchFamily="18" charset="0"/>
-              </a:rPr>
-              <a:t>найефективніших</a:t>
-            </a:r>
-            <a:r>
-              <a:rPr lang="ru-RU" sz="2400" dirty="0">
-                <a:latin typeface="Times New Roman" panose="02020603050405020304" pitchFamily="18" charset="0"/>
-                <a:cs typeface="Times New Roman" panose="02020603050405020304" pitchFamily="18" charset="0"/>
-              </a:rPr>
-              <a:t> моделей</a:t>
+              <a:rPr lang="ru-RU" sz="2400">
+                <a:latin typeface="Times New Roman" panose="02020603050405020304" pitchFamily="18" charset="0"/>
+                <a:cs typeface="Times New Roman" panose="02020603050405020304" pitchFamily="18" charset="0"/>
+              </a:rPr>
+              <a:t> системах</a:t>
             </a:r>
             <a:endParaRPr sz="2400" dirty="0">
               <a:latin typeface="Times New Roman" panose="02020603050405020304" pitchFamily="18" charset="0"/>
@@ -9666,6 +9638,58 @@
               <a:rPr lang="ru-RU" dirty="0">
                 <a:latin typeface="Times New Roman" panose="02020603050405020304" pitchFamily="18" charset="0"/>
                 <a:ea typeface="Times New Roman" panose="02020603050405020304" pitchFamily="18" charset="0"/>
+              </a:rPr>
+              <a:t>.</a:t>
+            </a:r>
+          </a:p>
+          <a:p>
+            <a:pPr marL="114300" indent="0">
+              <a:buNone/>
+            </a:pPr>
+            <a:r>
+              <a:rPr lang="en-US" dirty="0">
+                <a:latin typeface="Times New Roman" panose="02020603050405020304" pitchFamily="18" charset="0"/>
+                <a:ea typeface="Times New Roman" panose="02020603050405020304" pitchFamily="18" charset="0"/>
+              </a:rPr>
+              <a:t>Sample-ranking.</a:t>
+            </a:r>
+          </a:p>
+          <a:p>
+            <a:pPr marL="114300" indent="0">
+              <a:buNone/>
+            </a:pPr>
+            <a:r>
+              <a:rPr lang="ru-RU" dirty="0" err="1">
+                <a:latin typeface="Times New Roman" panose="02020603050405020304" pitchFamily="18" charset="0"/>
+                <a:cs typeface="Times New Roman" panose="02020603050405020304" pitchFamily="18" charset="0"/>
+              </a:rPr>
+              <a:t>Критерії</a:t>
+            </a:r>
+            <a:r>
+              <a:rPr lang="ru-RU" dirty="0">
+                <a:latin typeface="Times New Roman" panose="02020603050405020304" pitchFamily="18" charset="0"/>
+                <a:cs typeface="Times New Roman" panose="02020603050405020304" pitchFamily="18" charset="0"/>
+              </a:rPr>
+              <a:t> </a:t>
+            </a:r>
+            <a:r>
+              <a:rPr lang="ru-RU" dirty="0" err="1">
+                <a:latin typeface="Times New Roman" panose="02020603050405020304" pitchFamily="18" charset="0"/>
+                <a:cs typeface="Times New Roman" panose="02020603050405020304" pitchFamily="18" charset="0"/>
+              </a:rPr>
+              <a:t>оцінювання</a:t>
+            </a:r>
+            <a:r>
+              <a:rPr lang="ru-RU" dirty="0">
+                <a:latin typeface="Times New Roman" panose="02020603050405020304" pitchFamily="18" charset="0"/>
+                <a:cs typeface="Times New Roman" panose="02020603050405020304" pitchFamily="18" charset="0"/>
+              </a:rPr>
+              <a:t>: HR@K, NDCG@K</a:t>
+            </a:r>
+            <a:r>
+              <a:rPr lang="en-US" dirty="0">
+                <a:latin typeface="Times New Roman" panose="02020603050405020304" pitchFamily="18" charset="0"/>
+                <a:cs typeface="Times New Roman" panose="02020603050405020304" pitchFamily="18" charset="0"/>
               </a:rPr>
               <a:t>.</a:t>
             </a:r>
@@ -12045,8 +12069,8 @@
         </p:nvSpPr>
         <p:spPr>
           <a:xfrm>
-            <a:off x="1664677" y="745773"/>
-            <a:ext cx="7082130" cy="3970318"/>
+            <a:off x="239664" y="618658"/>
+            <a:ext cx="2786565" cy="954107"/>
           </a:xfrm>
           <a:prstGeom prst="rect">
             <a:avLst/>
@@ -12060,7 +12084,7 @@
           <a:lstStyle/>
           <a:p>
             <a:r>
-              <a:rPr lang="af-ZA" sz="1800" b="1" dirty="0">
+              <a:rPr lang="af-ZA" b="1" dirty="0">
                 <a:latin typeface="Times New Roman" panose="02020603050405020304" pitchFamily="18" charset="0"/>
                 <a:cs typeface="Times New Roman" panose="02020603050405020304" pitchFamily="18" charset="0"/>
               </a:rPr>
@@ -12069,14 +12093,14 @@
           </a:p>
           <a:p>
             <a:r>
-              <a:rPr lang="en-US" sz="1800" dirty="0">
+              <a:rPr lang="en-US" dirty="0">
                 <a:latin typeface="Times New Roman" panose="02020603050405020304" pitchFamily="18" charset="0"/>
                 <a:cs typeface="Times New Roman" panose="02020603050405020304" pitchFamily="18" charset="0"/>
               </a:rPr>
               <a:t>+ </a:t>
             </a:r>
             <a:r>
-              <a:rPr lang="uk-UA" sz="1800" dirty="0">
+              <a:rPr lang="uk-UA" dirty="0">
                 <a:latin typeface="Times New Roman" panose="02020603050405020304" pitchFamily="18" charset="0"/>
                 <a:cs typeface="Times New Roman" panose="02020603050405020304" pitchFamily="18" charset="0"/>
               </a:rPr>
@@ -12085,165 +12109,31 @@
           </a:p>
           <a:p>
             <a:r>
-              <a:rPr lang="en-US" sz="1800" dirty="0">
+              <a:rPr lang="en-US" dirty="0">
                 <a:latin typeface="Times New Roman" panose="02020603050405020304" pitchFamily="18" charset="0"/>
                 <a:cs typeface="Times New Roman" panose="02020603050405020304" pitchFamily="18" charset="0"/>
               </a:rPr>
               <a:t>+ </a:t>
             </a:r>
             <a:r>
-              <a:rPr lang="uk-UA" sz="1800" dirty="0">
+              <a:rPr lang="uk-UA" dirty="0">
                 <a:latin typeface="Times New Roman" panose="02020603050405020304" pitchFamily="18" charset="0"/>
                 <a:cs typeface="Times New Roman" panose="02020603050405020304" pitchFamily="18" charset="0"/>
               </a:rPr>
               <a:t>простота архітектури</a:t>
             </a:r>
             <a:br>
-              <a:rPr lang="uk-UA" sz="1800" dirty="0">
+              <a:rPr lang="uk-UA" dirty="0">
                 <a:latin typeface="Times New Roman" panose="02020603050405020304" pitchFamily="18" charset="0"/>
                 <a:cs typeface="Times New Roman" panose="02020603050405020304" pitchFamily="18" charset="0"/>
               </a:rPr>
             </a:br>
             <a:r>
-              <a:rPr lang="uk-UA" sz="1800" dirty="0">
+              <a:rPr lang="uk-UA" dirty="0">
                 <a:latin typeface="Times New Roman" panose="02020603050405020304" pitchFamily="18" charset="0"/>
                 <a:cs typeface="Times New Roman" panose="02020603050405020304" pitchFamily="18" charset="0"/>
               </a:rPr>
               <a:t>– нижча точність </a:t>
-            </a:r>
-          </a:p>
-          <a:p>
-            <a:endParaRPr lang="af-ZA" sz="1800" b="1" dirty="0">
-              <a:latin typeface="Times New Roman" panose="02020603050405020304" pitchFamily="18" charset="0"/>
-              <a:cs typeface="Times New Roman" panose="02020603050405020304" pitchFamily="18" charset="0"/>
-            </a:endParaRPr>
-          </a:p>
-          <a:p>
-            <a:r>
-              <a:rPr lang="af-ZA" sz="1800" b="1" dirty="0">
-                <a:latin typeface="Times New Roman" panose="02020603050405020304" pitchFamily="18" charset="0"/>
-                <a:cs typeface="Times New Roman" panose="02020603050405020304" pitchFamily="18" charset="0"/>
-              </a:rPr>
-              <a:t>BERT4Rec:</a:t>
-            </a:r>
-          </a:p>
-          <a:p>
-            <a:r>
-              <a:rPr lang="en-US" sz="1800" dirty="0">
-                <a:latin typeface="Times New Roman" panose="02020603050405020304" pitchFamily="18" charset="0"/>
-                <a:cs typeface="Times New Roman" panose="02020603050405020304" pitchFamily="18" charset="0"/>
-              </a:rPr>
-              <a:t>+ </a:t>
-            </a:r>
-            <a:r>
-              <a:rPr lang="uk-UA" sz="1800" dirty="0">
-                <a:latin typeface="Times New Roman" panose="02020603050405020304" pitchFamily="18" charset="0"/>
-                <a:cs typeface="Times New Roman" panose="02020603050405020304" pitchFamily="18" charset="0"/>
-              </a:rPr>
-              <a:t>висока якість рекомендацій </a:t>
-            </a:r>
-          </a:p>
-          <a:p>
-            <a:r>
-              <a:rPr lang="en-US" sz="1800" dirty="0">
-                <a:latin typeface="Times New Roman" panose="02020603050405020304" pitchFamily="18" charset="0"/>
-                <a:cs typeface="Times New Roman" panose="02020603050405020304" pitchFamily="18" charset="0"/>
-              </a:rPr>
-              <a:t>+ </a:t>
-            </a:r>
-            <a:r>
-              <a:rPr lang="uk-UA" sz="1800" dirty="0">
-                <a:latin typeface="Times New Roman" panose="02020603050405020304" pitchFamily="18" charset="0"/>
-                <a:cs typeface="Times New Roman" panose="02020603050405020304" pitchFamily="18" charset="0"/>
-              </a:rPr>
-              <a:t>ефективне використання контексту</a:t>
-            </a:r>
-            <a:br>
-              <a:rPr lang="uk-UA" sz="1800" dirty="0">
-                <a:latin typeface="Times New Roman" panose="02020603050405020304" pitchFamily="18" charset="0"/>
-                <a:cs typeface="Times New Roman" panose="02020603050405020304" pitchFamily="18" charset="0"/>
-              </a:rPr>
-            </a:br>
-            <a:r>
-              <a:rPr lang="uk-UA" sz="1800" dirty="0">
-                <a:latin typeface="Times New Roman" panose="02020603050405020304" pitchFamily="18" charset="0"/>
-                <a:cs typeface="Times New Roman" panose="02020603050405020304" pitchFamily="18" charset="0"/>
-              </a:rPr>
-              <a:t>– вищі обчислювальні витрати </a:t>
-            </a:r>
-          </a:p>
-          <a:p>
-            <a:endParaRPr lang="af-ZA" sz="1800" b="1" dirty="0">
-              <a:latin typeface="Times New Roman" panose="02020603050405020304" pitchFamily="18" charset="0"/>
-              <a:cs typeface="Times New Roman" panose="02020603050405020304" pitchFamily="18" charset="0"/>
-            </a:endParaRPr>
-          </a:p>
-          <a:p>
-            <a:r>
-              <a:rPr lang="af-ZA" sz="1800" b="1" dirty="0">
-                <a:latin typeface="Times New Roman" panose="02020603050405020304" pitchFamily="18" charset="0"/>
-                <a:cs typeface="Times New Roman" panose="02020603050405020304" pitchFamily="18" charset="0"/>
-              </a:rPr>
-              <a:t>S³-Rec:</a:t>
-            </a:r>
-          </a:p>
-          <a:p>
-            <a:r>
-              <a:rPr lang="en-US" sz="1800" dirty="0">
-                <a:latin typeface="Times New Roman" panose="02020603050405020304" pitchFamily="18" charset="0"/>
-                <a:cs typeface="Times New Roman" panose="02020603050405020304" pitchFamily="18" charset="0"/>
-              </a:rPr>
-              <a:t>+ </a:t>
-            </a:r>
-            <a:r>
-              <a:rPr lang="uk-UA" sz="1800" dirty="0">
-                <a:latin typeface="Times New Roman" panose="02020603050405020304" pitchFamily="18" charset="0"/>
-                <a:cs typeface="Times New Roman" panose="02020603050405020304" pitchFamily="18" charset="0"/>
-              </a:rPr>
-              <a:t>стійкість до розрідженості </a:t>
-            </a:r>
-          </a:p>
-          <a:p>
-            <a:r>
-              <a:rPr lang="en-US" sz="1800" dirty="0">
-                <a:latin typeface="Times New Roman" panose="02020603050405020304" pitchFamily="18" charset="0"/>
-                <a:cs typeface="Times New Roman" panose="02020603050405020304" pitchFamily="18" charset="0"/>
-              </a:rPr>
-              <a:t>+ </a:t>
-            </a:r>
-            <a:r>
-              <a:rPr lang="uk-UA" sz="1800" dirty="0">
-                <a:latin typeface="Times New Roman" panose="02020603050405020304" pitchFamily="18" charset="0"/>
-                <a:cs typeface="Times New Roman" panose="02020603050405020304" pitchFamily="18" charset="0"/>
-              </a:rPr>
-              <a:t>найкраща </a:t>
-            </a:r>
-            <a:r>
-              <a:rPr lang="uk-UA" sz="1800" dirty="0" err="1">
-                <a:latin typeface="Times New Roman" panose="02020603050405020304" pitchFamily="18" charset="0"/>
-                <a:cs typeface="Times New Roman" panose="02020603050405020304" pitchFamily="18" charset="0"/>
-              </a:rPr>
-              <a:t>узагальнювальна</a:t>
-            </a:r>
-            <a:r>
-              <a:rPr lang="uk-UA" sz="1800" dirty="0">
-                <a:latin typeface="Times New Roman" panose="02020603050405020304" pitchFamily="18" charset="0"/>
-                <a:cs typeface="Times New Roman" panose="02020603050405020304" pitchFamily="18" charset="0"/>
-              </a:rPr>
-              <a:t> здатність</a:t>
-            </a:r>
-            <a:br>
-              <a:rPr lang="uk-UA" sz="1800" dirty="0">
-                <a:latin typeface="Times New Roman" panose="02020603050405020304" pitchFamily="18" charset="0"/>
-                <a:cs typeface="Times New Roman" panose="02020603050405020304" pitchFamily="18" charset="0"/>
-              </a:rPr>
-            </a:br>
-            <a:r>
-              <a:rPr lang="uk-UA" sz="1800" dirty="0">
-                <a:latin typeface="Times New Roman" panose="02020603050405020304" pitchFamily="18" charset="0"/>
-                <a:cs typeface="Times New Roman" panose="02020603050405020304" pitchFamily="18" charset="0"/>
-              </a:rPr>
-              <a:t>– складніше навчання</a:t>
             </a:r>
           </a:p>
         </p:txBody>
@@ -12322,6 +12212,292 @@
           </a:p>
         </p:txBody>
       </p:sp>
+      <p:sp>
+        <p:nvSpPr>
+          <p:cNvPr id="5" name="TextBox 4">
+            <a:extLst>
+              <a:ext uri="{FF2B5EF4-FFF2-40B4-BE49-F238E27FC236}">
+                <a16:creationId xmlns:a16="http://schemas.microsoft.com/office/drawing/2014/main" id="{F41454F8-337C-287B-F39F-B8ABE8C2BDF9}"/>
+              </a:ext>
+            </a:extLst>
+          </p:cNvPr>
+          <p:cNvSpPr txBox="1"/>
+          <p:nvPr/>
+        </p:nvSpPr>
+        <p:spPr>
+          <a:xfrm>
+            <a:off x="5921694" y="618658"/>
+            <a:ext cx="3139551" cy="1169551"/>
+          </a:xfrm>
+          <a:prstGeom prst="rect">
+            <a:avLst/>
+          </a:prstGeom>
+          <a:noFill/>
+        </p:spPr>
+        <p:txBody>
+          <a:bodyPr wrap="square">
+            <a:spAutoFit/>
+          </a:bodyPr>
+          <a:lstStyle/>
+          <a:p>
+            <a:r>
+              <a:rPr lang="af-ZA" b="1" dirty="0">
+                <a:latin typeface="Times New Roman" panose="02020603050405020304" pitchFamily="18" charset="0"/>
+                <a:cs typeface="Times New Roman" panose="02020603050405020304" pitchFamily="18" charset="0"/>
+              </a:rPr>
+              <a:t>S³-Rec:</a:t>
+            </a:r>
+          </a:p>
+          <a:p>
+            <a:r>
+              <a:rPr lang="en-US" dirty="0">
+                <a:latin typeface="Times New Roman" panose="02020603050405020304" pitchFamily="18" charset="0"/>
+                <a:cs typeface="Times New Roman" panose="02020603050405020304" pitchFamily="18" charset="0"/>
+              </a:rPr>
+              <a:t>+ </a:t>
+            </a:r>
+            <a:r>
+              <a:rPr lang="uk-UA" dirty="0">
+                <a:latin typeface="Times New Roman" panose="02020603050405020304" pitchFamily="18" charset="0"/>
+                <a:cs typeface="Times New Roman" panose="02020603050405020304" pitchFamily="18" charset="0"/>
+              </a:rPr>
+              <a:t>стійкість до розрідженості </a:t>
+            </a:r>
+          </a:p>
+          <a:p>
+            <a:r>
+              <a:rPr lang="en-US" dirty="0">
+                <a:latin typeface="Times New Roman" panose="02020603050405020304" pitchFamily="18" charset="0"/>
+                <a:cs typeface="Times New Roman" panose="02020603050405020304" pitchFamily="18" charset="0"/>
+              </a:rPr>
+              <a:t>+ </a:t>
+            </a:r>
+            <a:r>
+              <a:rPr lang="uk-UA" dirty="0">
+                <a:latin typeface="Times New Roman" panose="02020603050405020304" pitchFamily="18" charset="0"/>
+                <a:cs typeface="Times New Roman" panose="02020603050405020304" pitchFamily="18" charset="0"/>
+              </a:rPr>
+              <a:t>найкраща </a:t>
+            </a:r>
+            <a:r>
+              <a:rPr lang="uk-UA" dirty="0" err="1">
+                <a:latin typeface="Times New Roman" panose="02020603050405020304" pitchFamily="18" charset="0"/>
+                <a:cs typeface="Times New Roman" panose="02020603050405020304" pitchFamily="18" charset="0"/>
+              </a:rPr>
+              <a:t>узагальнювальна</a:t>
+            </a:r>
+            <a:r>
+              <a:rPr lang="uk-UA" dirty="0">
+                <a:latin typeface="Times New Roman" panose="02020603050405020304" pitchFamily="18" charset="0"/>
+                <a:cs typeface="Times New Roman" panose="02020603050405020304" pitchFamily="18" charset="0"/>
+              </a:rPr>
+              <a:t> здатність</a:t>
+            </a:r>
+            <a:br>
+              <a:rPr lang="uk-UA" dirty="0">
+                <a:latin typeface="Times New Roman" panose="02020603050405020304" pitchFamily="18" charset="0"/>
+                <a:cs typeface="Times New Roman" panose="02020603050405020304" pitchFamily="18" charset="0"/>
+              </a:rPr>
+            </a:br>
+            <a:r>
+              <a:rPr lang="uk-UA" dirty="0">
+                <a:latin typeface="Times New Roman" panose="02020603050405020304" pitchFamily="18" charset="0"/>
+                <a:cs typeface="Times New Roman" panose="02020603050405020304" pitchFamily="18" charset="0"/>
+              </a:rPr>
+              <a:t>– складніше навчання</a:t>
+            </a:r>
+          </a:p>
+        </p:txBody>
+      </p:sp>
+      <p:sp>
+        <p:nvSpPr>
+          <p:cNvPr id="7" name="TextBox 6">
+            <a:extLst>
+              <a:ext uri="{FF2B5EF4-FFF2-40B4-BE49-F238E27FC236}">
+                <a16:creationId xmlns:a16="http://schemas.microsoft.com/office/drawing/2014/main" id="{34D9A222-050F-EEF8-24E5-D824242014A7}"/>
+              </a:ext>
+            </a:extLst>
+          </p:cNvPr>
+          <p:cNvSpPr txBox="1"/>
+          <p:nvPr/>
+        </p:nvSpPr>
+        <p:spPr>
+          <a:xfrm>
+            <a:off x="2481946" y="638058"/>
+            <a:ext cx="3439748" cy="954107"/>
+          </a:xfrm>
+          <a:prstGeom prst="rect">
+            <a:avLst/>
+          </a:prstGeom>
+          <a:noFill/>
+        </p:spPr>
+        <p:txBody>
+          <a:bodyPr wrap="square">
+            <a:spAutoFit/>
+          </a:bodyPr>
+          <a:lstStyle/>
+          <a:p>
+            <a:r>
+              <a:rPr lang="af-ZA" b="1" dirty="0">
+                <a:latin typeface="Times New Roman" panose="02020603050405020304" pitchFamily="18" charset="0"/>
+                <a:cs typeface="Times New Roman" panose="02020603050405020304" pitchFamily="18" charset="0"/>
+              </a:rPr>
+              <a:t>BERT4Rec:</a:t>
+            </a:r>
+          </a:p>
+          <a:p>
+            <a:r>
+              <a:rPr lang="en-US" dirty="0">
+                <a:latin typeface="Times New Roman" panose="02020603050405020304" pitchFamily="18" charset="0"/>
+                <a:cs typeface="Times New Roman" panose="02020603050405020304" pitchFamily="18" charset="0"/>
+              </a:rPr>
+              <a:t>+ </a:t>
+            </a:r>
+            <a:r>
+              <a:rPr lang="uk-UA" dirty="0">
+                <a:latin typeface="Times New Roman" panose="02020603050405020304" pitchFamily="18" charset="0"/>
+                <a:cs typeface="Times New Roman" panose="02020603050405020304" pitchFamily="18" charset="0"/>
+              </a:rPr>
+              <a:t>висока якість рекомендацій </a:t>
+            </a:r>
+          </a:p>
+          <a:p>
+            <a:r>
+              <a:rPr lang="en-US" dirty="0">
+                <a:latin typeface="Times New Roman" panose="02020603050405020304" pitchFamily="18" charset="0"/>
+                <a:cs typeface="Times New Roman" panose="02020603050405020304" pitchFamily="18" charset="0"/>
+              </a:rPr>
+              <a:t>+ </a:t>
+            </a:r>
+            <a:r>
+              <a:rPr lang="uk-UA" dirty="0">
+                <a:latin typeface="Times New Roman" panose="02020603050405020304" pitchFamily="18" charset="0"/>
+                <a:cs typeface="Times New Roman" panose="02020603050405020304" pitchFamily="18" charset="0"/>
+              </a:rPr>
+              <a:t>ефективне використання контексту</a:t>
+            </a:r>
+            <a:br>
+              <a:rPr lang="uk-UA" dirty="0">
+                <a:latin typeface="Times New Roman" panose="02020603050405020304" pitchFamily="18" charset="0"/>
+                <a:cs typeface="Times New Roman" panose="02020603050405020304" pitchFamily="18" charset="0"/>
+              </a:rPr>
+            </a:br>
+            <a:r>
+              <a:rPr lang="uk-UA" dirty="0">
+                <a:latin typeface="Times New Roman" panose="02020603050405020304" pitchFamily="18" charset="0"/>
+                <a:cs typeface="Times New Roman" panose="02020603050405020304" pitchFamily="18" charset="0"/>
+              </a:rPr>
+              <a:t>– вищі обчислювальні витрати</a:t>
+            </a:r>
+          </a:p>
+        </p:txBody>
+      </p:sp>
+      <p:pic>
+        <p:nvPicPr>
+          <p:cNvPr id="9" name="Рисунок 8">
+            <a:extLst>
+              <a:ext uri="{FF2B5EF4-FFF2-40B4-BE49-F238E27FC236}">
+                <a16:creationId xmlns:a16="http://schemas.microsoft.com/office/drawing/2014/main" id="{0269CA2A-9FCE-F364-38B7-2AEDD86D40DA}"/>
+              </a:ext>
+            </a:extLst>
+          </p:cNvPr>
+          <p:cNvPicPr>
+            <a:picLocks noChangeAspect="1"/>
+          </p:cNvPicPr>
+          <p:nvPr/>
+        </p:nvPicPr>
+        <p:blipFill>
+          <a:blip r:embed="rId4"/>
+          <a:stretch>
+            <a:fillRect/>
+          </a:stretch>
+        </p:blipFill>
+        <p:spPr>
+          <a:xfrm>
+            <a:off x="137885" y="1829845"/>
+            <a:ext cx="8665029" cy="2944965"/>
+          </a:xfrm>
+          <a:prstGeom prst="rect">
+            <a:avLst/>
+          </a:prstGeom>
+        </p:spPr>
+      </p:pic>
+      <p:cxnSp>
+        <p:nvCxnSpPr>
+          <p:cNvPr id="11" name="Straight Connector 9">
+            <a:extLst>
+              <a:ext uri="{FF2B5EF4-FFF2-40B4-BE49-F238E27FC236}">
+                <a16:creationId xmlns:a16="http://schemas.microsoft.com/office/drawing/2014/main" id="{8C29932A-9DE9-F83D-B1D8-DD6674AE61F4}"/>
+              </a:ext>
+            </a:extLst>
+          </p:cNvPr>
+          <p:cNvCxnSpPr>
+            <a:cxnSpLocks/>
+          </p:cNvCxnSpPr>
+          <p:nvPr/>
+        </p:nvCxnSpPr>
+        <p:spPr>
+          <a:xfrm>
+            <a:off x="2355222" y="745773"/>
+            <a:ext cx="0" cy="846392"/>
+          </a:xfrm>
+          <a:prstGeom prst="line">
+            <a:avLst/>
+          </a:prstGeom>
+        </p:spPr>
+        <p:style>
+          <a:lnRef idx="1">
+            <a:schemeClr val="accent1"/>
+          </a:lnRef>
+          <a:fillRef idx="0">
+            <a:schemeClr val="accent1"/>
+          </a:fillRef>
+          <a:effectRef idx="0">
+            <a:schemeClr val="accent1"/>
+          </a:effectRef>
+          <a:fontRef idx="minor">
+            <a:schemeClr val="tx1"/>
+          </a:fontRef>
+        </p:style>
+      </p:cxnSp>
+      <p:cxnSp>
+        <p:nvCxnSpPr>
+          <p:cNvPr id="13" name="Straight Connector 9">
+            <a:extLst>
+              <a:ext uri="{FF2B5EF4-FFF2-40B4-BE49-F238E27FC236}">
+                <a16:creationId xmlns:a16="http://schemas.microsoft.com/office/drawing/2014/main" id="{55837792-3959-4475-5192-4CB7E847DE61}"/>
+              </a:ext>
+            </a:extLst>
+          </p:cNvPr>
+          <p:cNvCxnSpPr>
+            <a:cxnSpLocks/>
+          </p:cNvCxnSpPr>
+          <p:nvPr/>
+        </p:nvCxnSpPr>
+        <p:spPr>
+          <a:xfrm>
+            <a:off x="5809622" y="745773"/>
+            <a:ext cx="0" cy="846392"/>
+          </a:xfrm>
+          <a:prstGeom prst="line">
+            <a:avLst/>
+          </a:prstGeom>
+        </p:spPr>
+        <p:style>
+          <a:lnRef idx="1">
+            <a:schemeClr val="accent1"/>
+          </a:lnRef>
+          <a:fillRef idx="0">
+            <a:schemeClr val="accent1"/>
+          </a:fillRef>
+          <a:effectRef idx="0">
+            <a:schemeClr val="accent1"/>
+          </a:effectRef>
+          <a:fontRef idx="minor">
+            <a:schemeClr val="tx1"/>
+          </a:fontRef>
+        </p:style>
+      </p:cxnSp>
     </p:spTree>
     <p:extLst>
       <p:ext uri="{BB962C8B-B14F-4D97-AF65-F5344CB8AC3E}">
@@ -12453,7 +12629,7 @@
         <p:spPr>
           <a:xfrm>
             <a:off x="194991" y="885157"/>
-            <a:ext cx="8800910" cy="2585323"/>
+            <a:ext cx="5059180" cy="1200329"/>
           </a:xfrm>
           <a:prstGeom prst="rect">
             <a:avLst/>
@@ -12649,264 +12825,6 @@
               <a:latin typeface="Times New Roman" panose="02020603050405020304" pitchFamily="18" charset="0"/>
               <a:cs typeface="Times New Roman" panose="02020603050405020304" pitchFamily="18" charset="0"/>
             </a:endParaRPr>
-          </a:p>
-          <a:p>
-            <a:endParaRPr lang="en-US" sz="1800" dirty="0">
-              <a:latin typeface="Times New Roman" panose="02020603050405020304" pitchFamily="18" charset="0"/>
-              <a:cs typeface="Times New Roman" panose="02020603050405020304" pitchFamily="18" charset="0"/>
-            </a:endParaRPr>
-          </a:p>
-          <a:p>
-            <a:r>
-              <a:rPr lang="ru-RU" sz="1800" dirty="0" err="1">
-                <a:latin typeface="Times New Roman" panose="02020603050405020304" pitchFamily="18" charset="0"/>
-                <a:cs typeface="Times New Roman" panose="02020603050405020304" pitchFamily="18" charset="0"/>
-              </a:rPr>
-              <a:t>Практичні</a:t>
-            </a:r>
-            <a:r>
-              <a:rPr lang="ru-RU" sz="1800" dirty="0">
-                <a:latin typeface="Times New Roman" panose="02020603050405020304" pitchFamily="18" charset="0"/>
-                <a:cs typeface="Times New Roman" panose="02020603050405020304" pitchFamily="18" charset="0"/>
-              </a:rPr>
-              <a:t> </a:t>
-            </a:r>
-            <a:r>
-              <a:rPr lang="ru-RU" sz="1800" dirty="0" err="1">
-                <a:latin typeface="Times New Roman" panose="02020603050405020304" pitchFamily="18" charset="0"/>
-                <a:cs typeface="Times New Roman" panose="02020603050405020304" pitchFamily="18" charset="0"/>
-              </a:rPr>
-              <a:t>рекомендації</a:t>
-            </a:r>
-            <a:r>
-              <a:rPr lang="en-US" sz="1800" dirty="0">
-                <a:latin typeface="Times New Roman" panose="02020603050405020304" pitchFamily="18" charset="0"/>
-                <a:cs typeface="Times New Roman" panose="02020603050405020304" pitchFamily="18" charset="0"/>
-              </a:rPr>
-              <a:t>:</a:t>
-            </a:r>
-            <a:endParaRPr lang="ru-RU" sz="1800" dirty="0">
-              <a:latin typeface="Times New Roman" panose="02020603050405020304" pitchFamily="18" charset="0"/>
-              <a:cs typeface="Times New Roman" panose="02020603050405020304" pitchFamily="18" charset="0"/>
-            </a:endParaRPr>
-          </a:p>
-          <a:p>
-            <a:pPr marL="285750" indent="-285750">
-              <a:buFont typeface="Symbol" panose="05050102010706020507" pitchFamily="18" charset="2"/>
-              <a:buChar char="-"/>
-            </a:pPr>
-            <a:r>
-              <a:rPr lang="ru-RU" sz="1800" dirty="0" err="1">
-                <a:latin typeface="Times New Roman" panose="02020603050405020304" pitchFamily="18" charset="0"/>
-                <a:cs typeface="Times New Roman" panose="02020603050405020304" pitchFamily="18" charset="0"/>
-              </a:rPr>
-              <a:t>SASRec</a:t>
-            </a:r>
-            <a:r>
-              <a:rPr lang="ru-RU" sz="1800" dirty="0">
-                <a:latin typeface="Times New Roman" panose="02020603050405020304" pitchFamily="18" charset="0"/>
-                <a:cs typeface="Times New Roman" panose="02020603050405020304" pitchFamily="18" charset="0"/>
-              </a:rPr>
-              <a:t> </a:t>
-            </a:r>
-            <a:r>
-              <a:rPr lang="ru-RU" sz="1800" dirty="0" err="1">
-                <a:latin typeface="Times New Roman" panose="02020603050405020304" pitchFamily="18" charset="0"/>
-                <a:cs typeface="Times New Roman" panose="02020603050405020304" pitchFamily="18" charset="0"/>
-              </a:rPr>
-              <a:t>доцільно</a:t>
-            </a:r>
-            <a:r>
-              <a:rPr lang="ru-RU" sz="1800" dirty="0">
-                <a:latin typeface="Times New Roman" panose="02020603050405020304" pitchFamily="18" charset="0"/>
-                <a:cs typeface="Times New Roman" panose="02020603050405020304" pitchFamily="18" charset="0"/>
-              </a:rPr>
-              <a:t> </a:t>
-            </a:r>
-            <a:r>
-              <a:rPr lang="ru-RU" sz="1800" dirty="0" err="1">
-                <a:latin typeface="Times New Roman" panose="02020603050405020304" pitchFamily="18" charset="0"/>
-                <a:cs typeface="Times New Roman" panose="02020603050405020304" pitchFamily="18" charset="0"/>
-              </a:rPr>
-              <a:t>використовувати</a:t>
-            </a:r>
-            <a:r>
-              <a:rPr lang="ru-RU" sz="1800" dirty="0">
-                <a:latin typeface="Times New Roman" panose="02020603050405020304" pitchFamily="18" charset="0"/>
-                <a:cs typeface="Times New Roman" panose="02020603050405020304" pitchFamily="18" charset="0"/>
-              </a:rPr>
-              <a:t> у системах з </a:t>
-            </a:r>
-            <a:r>
-              <a:rPr lang="ru-RU" sz="1800" dirty="0" err="1">
-                <a:latin typeface="Times New Roman" panose="02020603050405020304" pitchFamily="18" charset="0"/>
-                <a:cs typeface="Times New Roman" panose="02020603050405020304" pitchFamily="18" charset="0"/>
-              </a:rPr>
-              <a:t>обмеженими</a:t>
-            </a:r>
-            <a:r>
-              <a:rPr lang="ru-RU" sz="1800" dirty="0">
-                <a:latin typeface="Times New Roman" panose="02020603050405020304" pitchFamily="18" charset="0"/>
-                <a:cs typeface="Times New Roman" panose="02020603050405020304" pitchFamily="18" charset="0"/>
-              </a:rPr>
-              <a:t> ресурсами</a:t>
-            </a:r>
-            <a:r>
-              <a:rPr lang="en-US" sz="1800" dirty="0">
-                <a:latin typeface="Times New Roman" panose="02020603050405020304" pitchFamily="18" charset="0"/>
-                <a:cs typeface="Times New Roman" panose="02020603050405020304" pitchFamily="18" charset="0"/>
-              </a:rPr>
-              <a:t>;</a:t>
-            </a:r>
-            <a:r>
-              <a:rPr lang="ru-RU" sz="1800" dirty="0">
-                <a:latin typeface="Times New Roman" panose="02020603050405020304" pitchFamily="18" charset="0"/>
-                <a:cs typeface="Times New Roman" panose="02020603050405020304" pitchFamily="18" charset="0"/>
-              </a:rPr>
-              <a:t> </a:t>
-            </a:r>
-          </a:p>
-          <a:p>
-            <a:pPr marL="285750" indent="-285750">
-              <a:buFont typeface="Symbol" panose="05050102010706020507" pitchFamily="18" charset="2"/>
-              <a:buChar char="-"/>
-            </a:pPr>
-            <a:r>
-              <a:rPr lang="ru-RU" sz="1800" dirty="0">
-                <a:latin typeface="Times New Roman" panose="02020603050405020304" pitchFamily="18" charset="0"/>
-                <a:cs typeface="Times New Roman" panose="02020603050405020304" pitchFamily="18" charset="0"/>
-              </a:rPr>
-              <a:t>BERT4Rec рекомендовано для задач </a:t>
-            </a:r>
-            <a:r>
-              <a:rPr lang="ru-RU" sz="1800" dirty="0" err="1">
-                <a:latin typeface="Times New Roman" panose="02020603050405020304" pitchFamily="18" charset="0"/>
-                <a:cs typeface="Times New Roman" panose="02020603050405020304" pitchFamily="18" charset="0"/>
-              </a:rPr>
-              <a:t>із</a:t>
-            </a:r>
-            <a:r>
-              <a:rPr lang="ru-RU" sz="1800" dirty="0">
-                <a:latin typeface="Times New Roman" panose="02020603050405020304" pitchFamily="18" charset="0"/>
-                <a:cs typeface="Times New Roman" panose="02020603050405020304" pitchFamily="18" charset="0"/>
-              </a:rPr>
-              <a:t> </a:t>
-            </a:r>
-            <a:r>
-              <a:rPr lang="ru-RU" sz="1800" dirty="0" err="1">
-                <a:latin typeface="Times New Roman" panose="02020603050405020304" pitchFamily="18" charset="0"/>
-                <a:cs typeface="Times New Roman" panose="02020603050405020304" pitchFamily="18" charset="0"/>
-              </a:rPr>
-              <a:t>високими</a:t>
-            </a:r>
-            <a:r>
-              <a:rPr lang="ru-RU" sz="1800" dirty="0">
-                <a:latin typeface="Times New Roman" panose="02020603050405020304" pitchFamily="18" charset="0"/>
-                <a:cs typeface="Times New Roman" panose="02020603050405020304" pitchFamily="18" charset="0"/>
-              </a:rPr>
-              <a:t> </a:t>
-            </a:r>
-            <a:r>
-              <a:rPr lang="ru-RU" sz="1800" dirty="0" err="1">
-                <a:latin typeface="Times New Roman" panose="02020603050405020304" pitchFamily="18" charset="0"/>
-                <a:cs typeface="Times New Roman" panose="02020603050405020304" pitchFamily="18" charset="0"/>
-              </a:rPr>
-              <a:t>вимогами</a:t>
-            </a:r>
-            <a:r>
-              <a:rPr lang="ru-RU" sz="1800" dirty="0">
-                <a:latin typeface="Times New Roman" panose="02020603050405020304" pitchFamily="18" charset="0"/>
-                <a:cs typeface="Times New Roman" panose="02020603050405020304" pitchFamily="18" charset="0"/>
-              </a:rPr>
-              <a:t> до </a:t>
-            </a:r>
-            <a:r>
-              <a:rPr lang="ru-RU" sz="1800" dirty="0" err="1">
-                <a:latin typeface="Times New Roman" panose="02020603050405020304" pitchFamily="18" charset="0"/>
-                <a:cs typeface="Times New Roman" panose="02020603050405020304" pitchFamily="18" charset="0"/>
-              </a:rPr>
-              <a:t>точності</a:t>
-            </a:r>
-            <a:r>
-              <a:rPr lang="en-US" sz="1800" dirty="0">
-                <a:latin typeface="Times New Roman" panose="02020603050405020304" pitchFamily="18" charset="0"/>
-                <a:cs typeface="Times New Roman" panose="02020603050405020304" pitchFamily="18" charset="0"/>
-              </a:rPr>
-              <a:t>;</a:t>
-            </a:r>
-            <a:endParaRPr lang="ru-RU" sz="1800" dirty="0">
-              <a:latin typeface="Times New Roman" panose="02020603050405020304" pitchFamily="18" charset="0"/>
-              <a:cs typeface="Times New Roman" panose="02020603050405020304" pitchFamily="18" charset="0"/>
-            </a:endParaRPr>
-          </a:p>
-          <a:p>
-            <a:pPr marL="285750" indent="-285750">
-              <a:buFont typeface="Symbol" panose="05050102010706020507" pitchFamily="18" charset="2"/>
-              <a:buChar char="-"/>
-            </a:pPr>
-            <a:r>
-              <a:rPr lang="ru-RU" sz="1800" dirty="0">
-                <a:latin typeface="Times New Roman" panose="02020603050405020304" pitchFamily="18" charset="0"/>
-                <a:cs typeface="Times New Roman" panose="02020603050405020304" pitchFamily="18" charset="0"/>
-              </a:rPr>
-              <a:t>S³-Rec </a:t>
-            </a:r>
-            <a:r>
-              <a:rPr lang="ru-RU" sz="1800" dirty="0" err="1">
-                <a:latin typeface="Times New Roman" panose="02020603050405020304" pitchFamily="18" charset="0"/>
-                <a:cs typeface="Times New Roman" panose="02020603050405020304" pitchFamily="18" charset="0"/>
-              </a:rPr>
-              <a:t>доцільно</a:t>
-            </a:r>
-            <a:r>
-              <a:rPr lang="ru-RU" sz="1800" dirty="0">
-                <a:latin typeface="Times New Roman" panose="02020603050405020304" pitchFamily="18" charset="0"/>
-                <a:cs typeface="Times New Roman" panose="02020603050405020304" pitchFamily="18" charset="0"/>
-              </a:rPr>
-              <a:t> </a:t>
-            </a:r>
-            <a:r>
-              <a:rPr lang="ru-RU" sz="1800" dirty="0" err="1">
-                <a:latin typeface="Times New Roman" panose="02020603050405020304" pitchFamily="18" charset="0"/>
-                <a:cs typeface="Times New Roman" panose="02020603050405020304" pitchFamily="18" charset="0"/>
-              </a:rPr>
-              <a:t>застосовувати</a:t>
-            </a:r>
-            <a:r>
-              <a:rPr lang="ru-RU" sz="1800" dirty="0">
-                <a:latin typeface="Times New Roman" panose="02020603050405020304" pitchFamily="18" charset="0"/>
-                <a:cs typeface="Times New Roman" panose="02020603050405020304" pitchFamily="18" charset="0"/>
-              </a:rPr>
-              <a:t> для великих і </a:t>
-            </a:r>
-            <a:r>
-              <a:rPr lang="ru-RU" sz="1800" dirty="0" err="1">
-                <a:latin typeface="Times New Roman" panose="02020603050405020304" pitchFamily="18" charset="0"/>
-                <a:cs typeface="Times New Roman" panose="02020603050405020304" pitchFamily="18" charset="0"/>
-              </a:rPr>
-              <a:t>розріджених</a:t>
-            </a:r>
-            <a:r>
-              <a:rPr lang="ru-RU" sz="1800" dirty="0">
-                <a:latin typeface="Times New Roman" panose="02020603050405020304" pitchFamily="18" charset="0"/>
-                <a:cs typeface="Times New Roman" panose="02020603050405020304" pitchFamily="18" charset="0"/>
-              </a:rPr>
-              <a:t> </a:t>
-            </a:r>
-            <a:r>
-              <a:rPr lang="ru-RU" sz="1800" dirty="0" err="1">
-                <a:latin typeface="Times New Roman" panose="02020603050405020304" pitchFamily="18" charset="0"/>
-                <a:cs typeface="Times New Roman" panose="02020603050405020304" pitchFamily="18" charset="0"/>
-              </a:rPr>
-              <a:t>датасетів</a:t>
-            </a:r>
-            <a:r>
-              <a:rPr lang="ru-RU" sz="1800" dirty="0">
-                <a:latin typeface="Times New Roman" panose="02020603050405020304" pitchFamily="18" charset="0"/>
-                <a:cs typeface="Times New Roman" panose="02020603050405020304" pitchFamily="18" charset="0"/>
-              </a:rPr>
-              <a:t>.</a:t>
-            </a:r>
           </a:p>
         </p:txBody>
       </p:sp>
@@ -12942,6 +12860,317 @@
           <a:ln>
             <a:noFill/>
           </a:ln>
+        </p:spPr>
+      </p:pic>
+      <p:sp>
+        <p:nvSpPr>
+          <p:cNvPr id="5" name="TextBox 4">
+            <a:extLst>
+              <a:ext uri="{FF2B5EF4-FFF2-40B4-BE49-F238E27FC236}">
+                <a16:creationId xmlns:a16="http://schemas.microsoft.com/office/drawing/2014/main" id="{258A249A-A802-96C5-75FA-D9DF959E7511}"/>
+              </a:ext>
+            </a:extLst>
+          </p:cNvPr>
+          <p:cNvSpPr txBox="1"/>
+          <p:nvPr/>
+        </p:nvSpPr>
+        <p:spPr>
+          <a:xfrm>
+            <a:off x="171544" y="2042352"/>
+            <a:ext cx="4219027" cy="2308324"/>
+          </a:xfrm>
+          <a:prstGeom prst="rect">
+            <a:avLst/>
+          </a:prstGeom>
+          <a:noFill/>
+        </p:spPr>
+        <p:txBody>
+          <a:bodyPr wrap="square">
+            <a:spAutoFit/>
+          </a:bodyPr>
+          <a:lstStyle/>
+          <a:p>
+            <a:r>
+              <a:rPr lang="ru-RU" sz="1800" dirty="0" err="1">
+                <a:latin typeface="Times New Roman" panose="02020603050405020304" pitchFamily="18" charset="0"/>
+                <a:cs typeface="Times New Roman" panose="02020603050405020304" pitchFamily="18" charset="0"/>
+              </a:rPr>
+              <a:t>Практичні</a:t>
+            </a:r>
+            <a:r>
+              <a:rPr lang="ru-RU" sz="1800" dirty="0">
+                <a:latin typeface="Times New Roman" panose="02020603050405020304" pitchFamily="18" charset="0"/>
+                <a:cs typeface="Times New Roman" panose="02020603050405020304" pitchFamily="18" charset="0"/>
+              </a:rPr>
+              <a:t> </a:t>
+            </a:r>
+            <a:r>
+              <a:rPr lang="ru-RU" sz="1800" dirty="0" err="1">
+                <a:latin typeface="Times New Roman" panose="02020603050405020304" pitchFamily="18" charset="0"/>
+                <a:cs typeface="Times New Roman" panose="02020603050405020304" pitchFamily="18" charset="0"/>
+              </a:rPr>
+              <a:t>рекомендації</a:t>
+            </a:r>
+            <a:r>
+              <a:rPr lang="en-US" sz="1800" dirty="0">
+                <a:latin typeface="Times New Roman" panose="02020603050405020304" pitchFamily="18" charset="0"/>
+                <a:cs typeface="Times New Roman" panose="02020603050405020304" pitchFamily="18" charset="0"/>
+              </a:rPr>
+              <a:t>:</a:t>
+            </a:r>
+            <a:endParaRPr lang="ru-RU" sz="1800" dirty="0">
+              <a:latin typeface="Times New Roman" panose="02020603050405020304" pitchFamily="18" charset="0"/>
+              <a:cs typeface="Times New Roman" panose="02020603050405020304" pitchFamily="18" charset="0"/>
+            </a:endParaRPr>
+          </a:p>
+          <a:p>
+            <a:pPr marL="285750" indent="-285750">
+              <a:buFont typeface="Symbol" panose="05050102010706020507" pitchFamily="18" charset="2"/>
+              <a:buChar char="-"/>
+            </a:pPr>
+            <a:r>
+              <a:rPr lang="ru-RU" sz="1800" dirty="0" err="1">
+                <a:latin typeface="Times New Roman" panose="02020603050405020304" pitchFamily="18" charset="0"/>
+                <a:cs typeface="Times New Roman" panose="02020603050405020304" pitchFamily="18" charset="0"/>
+              </a:rPr>
+              <a:t>SASRec</a:t>
+            </a:r>
+            <a:r>
+              <a:rPr lang="ru-RU" sz="1800" dirty="0">
+                <a:latin typeface="Times New Roman" panose="02020603050405020304" pitchFamily="18" charset="0"/>
+                <a:cs typeface="Times New Roman" panose="02020603050405020304" pitchFamily="18" charset="0"/>
+              </a:rPr>
+              <a:t> </a:t>
+            </a:r>
+            <a:r>
+              <a:rPr lang="ru-RU" sz="1800" dirty="0" err="1">
+                <a:latin typeface="Times New Roman" panose="02020603050405020304" pitchFamily="18" charset="0"/>
+                <a:cs typeface="Times New Roman" panose="02020603050405020304" pitchFamily="18" charset="0"/>
+              </a:rPr>
+              <a:t>доцільно</a:t>
+            </a:r>
+            <a:r>
+              <a:rPr lang="ru-RU" sz="1800" dirty="0">
+                <a:latin typeface="Times New Roman" panose="02020603050405020304" pitchFamily="18" charset="0"/>
+                <a:cs typeface="Times New Roman" panose="02020603050405020304" pitchFamily="18" charset="0"/>
+              </a:rPr>
+              <a:t> </a:t>
+            </a:r>
+            <a:r>
+              <a:rPr lang="ru-RU" sz="1800" dirty="0" err="1">
+                <a:latin typeface="Times New Roman" panose="02020603050405020304" pitchFamily="18" charset="0"/>
+                <a:cs typeface="Times New Roman" panose="02020603050405020304" pitchFamily="18" charset="0"/>
+              </a:rPr>
+              <a:t>використовувати</a:t>
+            </a:r>
+            <a:r>
+              <a:rPr lang="ru-RU" sz="1800" dirty="0">
+                <a:latin typeface="Times New Roman" panose="02020603050405020304" pitchFamily="18" charset="0"/>
+                <a:cs typeface="Times New Roman" panose="02020603050405020304" pitchFamily="18" charset="0"/>
+              </a:rPr>
+              <a:t> у системах з </a:t>
+            </a:r>
+            <a:r>
+              <a:rPr lang="ru-RU" sz="1800" dirty="0" err="1">
+                <a:latin typeface="Times New Roman" panose="02020603050405020304" pitchFamily="18" charset="0"/>
+                <a:cs typeface="Times New Roman" panose="02020603050405020304" pitchFamily="18" charset="0"/>
+              </a:rPr>
+              <a:t>обмеженими</a:t>
+            </a:r>
+            <a:r>
+              <a:rPr lang="ru-RU" sz="1800" dirty="0">
+                <a:latin typeface="Times New Roman" panose="02020603050405020304" pitchFamily="18" charset="0"/>
+                <a:cs typeface="Times New Roman" panose="02020603050405020304" pitchFamily="18" charset="0"/>
+              </a:rPr>
+              <a:t> ресурсами</a:t>
+            </a:r>
+            <a:r>
+              <a:rPr lang="en-US" sz="1800" dirty="0">
+                <a:latin typeface="Times New Roman" panose="02020603050405020304" pitchFamily="18" charset="0"/>
+                <a:cs typeface="Times New Roman" panose="02020603050405020304" pitchFamily="18" charset="0"/>
+              </a:rPr>
+              <a:t>;</a:t>
+            </a:r>
+            <a:r>
+              <a:rPr lang="ru-RU" sz="1800" dirty="0">
+                <a:latin typeface="Times New Roman" panose="02020603050405020304" pitchFamily="18" charset="0"/>
+                <a:cs typeface="Times New Roman" panose="02020603050405020304" pitchFamily="18" charset="0"/>
+              </a:rPr>
+              <a:t> </a:t>
+            </a:r>
+          </a:p>
+          <a:p>
+            <a:pPr marL="285750" indent="-285750">
+              <a:buFont typeface="Symbol" panose="05050102010706020507" pitchFamily="18" charset="2"/>
+              <a:buChar char="-"/>
+            </a:pPr>
+            <a:r>
+              <a:rPr lang="ru-RU" sz="1800" dirty="0">
+                <a:latin typeface="Times New Roman" panose="02020603050405020304" pitchFamily="18" charset="0"/>
+                <a:cs typeface="Times New Roman" panose="02020603050405020304" pitchFamily="18" charset="0"/>
+              </a:rPr>
+              <a:t>BERT4Rec рекомендовано для задач </a:t>
+            </a:r>
+            <a:r>
+              <a:rPr lang="ru-RU" sz="1800" dirty="0" err="1">
+                <a:latin typeface="Times New Roman" panose="02020603050405020304" pitchFamily="18" charset="0"/>
+                <a:cs typeface="Times New Roman" panose="02020603050405020304" pitchFamily="18" charset="0"/>
+              </a:rPr>
+              <a:t>із</a:t>
+            </a:r>
+            <a:r>
+              <a:rPr lang="ru-RU" sz="1800" dirty="0">
+                <a:latin typeface="Times New Roman" panose="02020603050405020304" pitchFamily="18" charset="0"/>
+                <a:cs typeface="Times New Roman" panose="02020603050405020304" pitchFamily="18" charset="0"/>
+              </a:rPr>
+              <a:t> </a:t>
+            </a:r>
+            <a:r>
+              <a:rPr lang="ru-RU" sz="1800" dirty="0" err="1">
+                <a:latin typeface="Times New Roman" panose="02020603050405020304" pitchFamily="18" charset="0"/>
+                <a:cs typeface="Times New Roman" panose="02020603050405020304" pitchFamily="18" charset="0"/>
+              </a:rPr>
+              <a:t>складними</a:t>
+            </a:r>
+            <a:r>
+              <a:rPr lang="ru-RU" sz="1800" dirty="0">
+                <a:latin typeface="Times New Roman" panose="02020603050405020304" pitchFamily="18" charset="0"/>
+                <a:cs typeface="Times New Roman" panose="02020603050405020304" pitchFamily="18" charset="0"/>
+              </a:rPr>
+              <a:t> </a:t>
+            </a:r>
+            <a:r>
+              <a:rPr lang="ru-RU" sz="1800" dirty="0" err="1">
+                <a:latin typeface="Times New Roman" panose="02020603050405020304" pitchFamily="18" charset="0"/>
+                <a:cs typeface="Times New Roman" panose="02020603050405020304" pitchFamily="18" charset="0"/>
+              </a:rPr>
+              <a:t>поведінковими</a:t>
+            </a:r>
+            <a:r>
+              <a:rPr lang="ru-RU" sz="1800" dirty="0">
+                <a:latin typeface="Times New Roman" panose="02020603050405020304" pitchFamily="18" charset="0"/>
+                <a:cs typeface="Times New Roman" panose="02020603050405020304" pitchFamily="18" charset="0"/>
+              </a:rPr>
+              <a:t> </a:t>
+            </a:r>
+            <a:r>
+              <a:rPr lang="ru-RU" sz="1800" dirty="0" err="1">
+                <a:latin typeface="Times New Roman" panose="02020603050405020304" pitchFamily="18" charset="0"/>
+                <a:cs typeface="Times New Roman" panose="02020603050405020304" pitchFamily="18" charset="0"/>
+              </a:rPr>
+              <a:t>послідовностями</a:t>
+            </a:r>
+            <a:r>
+              <a:rPr lang="en-US" sz="1800" dirty="0">
+                <a:latin typeface="Times New Roman" panose="02020603050405020304" pitchFamily="18" charset="0"/>
+                <a:cs typeface="Times New Roman" panose="02020603050405020304" pitchFamily="18" charset="0"/>
+              </a:rPr>
+              <a:t>;</a:t>
+            </a:r>
+            <a:endParaRPr lang="ru-RU" sz="1800" dirty="0">
+              <a:latin typeface="Times New Roman" panose="02020603050405020304" pitchFamily="18" charset="0"/>
+              <a:cs typeface="Times New Roman" panose="02020603050405020304" pitchFamily="18" charset="0"/>
+            </a:endParaRPr>
+          </a:p>
+          <a:p>
+            <a:pPr marL="285750" indent="-285750">
+              <a:buFont typeface="Symbol" panose="05050102010706020507" pitchFamily="18" charset="2"/>
+              <a:buChar char="-"/>
+            </a:pPr>
+            <a:r>
+              <a:rPr lang="ru-RU" sz="1800" dirty="0">
+                <a:latin typeface="Times New Roman" panose="02020603050405020304" pitchFamily="18" charset="0"/>
+                <a:cs typeface="Times New Roman" panose="02020603050405020304" pitchFamily="18" charset="0"/>
+              </a:rPr>
+              <a:t>S³-Rec </a:t>
+            </a:r>
+            <a:r>
+              <a:rPr lang="ru-RU" sz="1800" dirty="0" err="1">
+                <a:latin typeface="Times New Roman" panose="02020603050405020304" pitchFamily="18" charset="0"/>
+                <a:cs typeface="Times New Roman" panose="02020603050405020304" pitchFamily="18" charset="0"/>
+              </a:rPr>
+              <a:t>доцільно</a:t>
+            </a:r>
+            <a:r>
+              <a:rPr lang="ru-RU" sz="1800" dirty="0">
+                <a:latin typeface="Times New Roman" panose="02020603050405020304" pitchFamily="18" charset="0"/>
+                <a:cs typeface="Times New Roman" panose="02020603050405020304" pitchFamily="18" charset="0"/>
+              </a:rPr>
+              <a:t> </a:t>
+            </a:r>
+            <a:r>
+              <a:rPr lang="ru-RU" sz="1800" dirty="0" err="1">
+                <a:latin typeface="Times New Roman" panose="02020603050405020304" pitchFamily="18" charset="0"/>
+                <a:cs typeface="Times New Roman" panose="02020603050405020304" pitchFamily="18" charset="0"/>
+              </a:rPr>
+              <a:t>застосовувати</a:t>
+            </a:r>
+            <a:r>
+              <a:rPr lang="ru-RU" sz="1800" dirty="0">
+                <a:latin typeface="Times New Roman" panose="02020603050405020304" pitchFamily="18" charset="0"/>
+                <a:cs typeface="Times New Roman" panose="02020603050405020304" pitchFamily="18" charset="0"/>
+              </a:rPr>
+              <a:t> для великих і </a:t>
+            </a:r>
+            <a:r>
+              <a:rPr lang="ru-RU" sz="1800" dirty="0" err="1">
+                <a:latin typeface="Times New Roman" panose="02020603050405020304" pitchFamily="18" charset="0"/>
+                <a:cs typeface="Times New Roman" panose="02020603050405020304" pitchFamily="18" charset="0"/>
+              </a:rPr>
+              <a:t>розріджених</a:t>
+            </a:r>
+            <a:r>
+              <a:rPr lang="ru-RU" sz="1800" dirty="0">
+                <a:latin typeface="Times New Roman" panose="02020603050405020304" pitchFamily="18" charset="0"/>
+                <a:cs typeface="Times New Roman" panose="02020603050405020304" pitchFamily="18" charset="0"/>
+              </a:rPr>
+              <a:t> </a:t>
+            </a:r>
+            <a:r>
+              <a:rPr lang="ru-RU" sz="1800" dirty="0" err="1">
+                <a:latin typeface="Times New Roman" panose="02020603050405020304" pitchFamily="18" charset="0"/>
+                <a:cs typeface="Times New Roman" panose="02020603050405020304" pitchFamily="18" charset="0"/>
+              </a:rPr>
+              <a:t>датасетів</a:t>
+            </a:r>
+            <a:r>
+              <a:rPr lang="ru-RU" sz="1800" dirty="0">
+                <a:latin typeface="Times New Roman" panose="02020603050405020304" pitchFamily="18" charset="0"/>
+                <a:cs typeface="Times New Roman" panose="02020603050405020304" pitchFamily="18" charset="0"/>
+              </a:rPr>
+              <a:t>.</a:t>
+            </a:r>
+          </a:p>
+        </p:txBody>
+      </p:sp>
+      <p:pic>
+        <p:nvPicPr>
+          <p:cNvPr id="7" name="Рисунок 6">
+            <a:extLst>
+              <a:ext uri="{FF2B5EF4-FFF2-40B4-BE49-F238E27FC236}">
+                <a16:creationId xmlns:a16="http://schemas.microsoft.com/office/drawing/2014/main" id="{6C5D320A-051D-8EF5-F516-D97D1C5D848A}"/>
+              </a:ext>
+            </a:extLst>
+          </p:cNvPr>
+          <p:cNvPicPr>
+            <a:picLocks noChangeAspect="1"/>
+          </p:cNvPicPr>
+          <p:nvPr/>
+        </p:nvPicPr>
+        <p:blipFill>
+          <a:blip r:embed="rId4"/>
+          <a:stretch>
+            <a:fillRect/>
+          </a:stretch>
+        </p:blipFill>
+        <p:spPr>
+          <a:xfrm>
+            <a:off x="4414018" y="1290168"/>
+            <a:ext cx="4561421" cy="2786743"/>
+          </a:xfrm>
+          <a:prstGeom prst="rect">
+            <a:avLst/>
+          </a:prstGeom>
         </p:spPr>
       </p:pic>
     </p:spTree>
@@ -13094,8 +13323,8 @@
         </p:nvSpPr>
         <p:spPr>
           <a:xfrm>
-            <a:off x="171545" y="885157"/>
-            <a:ext cx="8800910" cy="2585323"/>
+            <a:off x="171544" y="885157"/>
+            <a:ext cx="5380169" cy="3139321"/>
           </a:xfrm>
           <a:prstGeom prst="rect">
             <a:avLst/>
@@ -13108,238 +13337,158 @@
           </a:bodyPr>
           <a:lstStyle/>
           <a:p>
-            <a:pPr marL="426720" indent="-285750" algn="just">
+            <a:pPr marR="32385" algn="just">
+              <a:buSzPts val="1400"/>
+              <a:tabLst>
+                <a:tab pos="630555" algn="l"/>
+              </a:tabLst>
+            </a:pPr>
+            <a:r>
+              <a:rPr lang="uk-UA" sz="1800" dirty="0">
+                <a:latin typeface="Times New Roman" panose="02020603050405020304" pitchFamily="18" charset="0"/>
+                <a:ea typeface="Times New Roman" panose="02020603050405020304" pitchFamily="18" charset="0"/>
+              </a:rPr>
+              <a:t>Було проведено:</a:t>
+            </a:r>
+          </a:p>
+          <a:p>
+            <a:pPr marL="285750" marR="32385" indent="-285750" algn="just">
+              <a:buSzPts val="1400"/>
               <a:buFont typeface="Symbol" panose="05050102010706020507" pitchFamily="18" charset="2"/>
-              <a:buChar char=""/>
+              <a:buChar char="-"/>
+              <a:tabLst>
+                <a:tab pos="630555" algn="l"/>
+              </a:tabLst>
             </a:pPr>
             <a:r>
               <a:rPr lang="uk-UA" sz="1800" dirty="0">
                 <a:latin typeface="Times New Roman" panose="02020603050405020304" pitchFamily="18" charset="0"/>
-                <a:ea typeface="Calibri" panose="020F0502020204030204" pitchFamily="34" charset="0"/>
-                <a:cs typeface="Times New Roman" panose="02020603050405020304" pitchFamily="18" charset="0"/>
-              </a:rPr>
-              <a:t>проведено аналіз предметної області </a:t>
+                <a:ea typeface="Times New Roman" panose="02020603050405020304" pitchFamily="18" charset="0"/>
+              </a:rPr>
+              <a:t>аналіз предметної області;</a:t>
+            </a:r>
+          </a:p>
+          <a:p>
+            <a:pPr marL="285750" marR="32385" indent="-285750" algn="just">
+              <a:buSzPts val="1400"/>
+              <a:buFont typeface="Symbol" panose="05050102010706020507" pitchFamily="18" charset="2"/>
+              <a:buChar char="-"/>
+              <a:tabLst>
+                <a:tab pos="630555" algn="l"/>
+              </a:tabLst>
+            </a:pPr>
+            <a:r>
+              <a:rPr lang="uk-UA" sz="1800" dirty="0">
+                <a:latin typeface="Times New Roman" panose="02020603050405020304" pitchFamily="18" charset="0"/>
+                <a:ea typeface="Times New Roman" panose="02020603050405020304" pitchFamily="18" charset="0"/>
+              </a:rPr>
+              <a:t>огляд сучасних наукових підходів;</a:t>
+            </a:r>
+          </a:p>
+          <a:p>
+            <a:pPr marL="285750" marR="32385" indent="-285750" algn="just">
+              <a:buSzPts val="1400"/>
+              <a:buFont typeface="Symbol" panose="05050102010706020507" pitchFamily="18" charset="2"/>
+              <a:buChar char="-"/>
+              <a:tabLst>
+                <a:tab pos="630555" algn="l"/>
+              </a:tabLst>
+            </a:pPr>
+            <a:r>
+              <a:rPr lang="uk-UA" sz="1800" dirty="0">
+                <a:latin typeface="Times New Roman" panose="02020603050405020304" pitchFamily="18" charset="0"/>
+                <a:ea typeface="Times New Roman" panose="02020603050405020304" pitchFamily="18" charset="0"/>
+              </a:rPr>
+              <a:t>аналіз </a:t>
             </a:r>
             <a:r>
               <a:rPr lang="uk-UA" sz="1800" dirty="0" err="1">
                 <a:latin typeface="Times New Roman" panose="02020603050405020304" pitchFamily="18" charset="0"/>
-                <a:ea typeface="Calibri" panose="020F0502020204030204" pitchFamily="34" charset="0"/>
-                <a:cs typeface="Times New Roman" panose="02020603050405020304" pitchFamily="18" charset="0"/>
-              </a:rPr>
-              <a:t>секвенційних</a:t>
+                <a:ea typeface="Times New Roman" panose="02020603050405020304" pitchFamily="18" charset="0"/>
+              </a:rPr>
+              <a:t>трансформерних</a:t>
             </a:r>
             <a:r>
               <a:rPr lang="uk-UA" sz="1800" dirty="0">
                 <a:latin typeface="Times New Roman" panose="02020603050405020304" pitchFamily="18" charset="0"/>
-                <a:ea typeface="Calibri" panose="020F0502020204030204" pitchFamily="34" charset="0"/>
-                <a:cs typeface="Times New Roman" panose="02020603050405020304" pitchFamily="18" charset="0"/>
-              </a:rPr>
-              <a:t> рекомендаційних систем;</a:t>
-            </a:r>
-            <a:endParaRPr lang="en-US" sz="1800" dirty="0">
-              <a:latin typeface="Times New Roman" panose="02020603050405020304" pitchFamily="18" charset="0"/>
-              <a:ea typeface="Calibri" panose="020F0502020204030204" pitchFamily="34" charset="0"/>
-              <a:cs typeface="Times New Roman" panose="02020603050405020304" pitchFamily="18" charset="0"/>
-            </a:endParaRPr>
-          </a:p>
-          <a:p>
-            <a:pPr marL="426720" indent="-285750" algn="just">
+                <a:ea typeface="Times New Roman" panose="02020603050405020304" pitchFamily="18" charset="0"/>
+              </a:rPr>
+              <a:t> </a:t>
+            </a:r>
+            <a:r>
+              <a:rPr lang="uk-UA" sz="1800" dirty="0" err="1">
+                <a:latin typeface="Times New Roman" panose="02020603050405020304" pitchFamily="18" charset="0"/>
+                <a:ea typeface="Times New Roman" panose="02020603050405020304" pitchFamily="18" charset="0"/>
+              </a:rPr>
+              <a:t>архітектур</a:t>
+            </a:r>
+            <a:r>
+              <a:rPr lang="uk-UA" sz="1800" dirty="0">
+                <a:latin typeface="Times New Roman" panose="02020603050405020304" pitchFamily="18" charset="0"/>
+                <a:ea typeface="Times New Roman" panose="02020603050405020304" pitchFamily="18" charset="0"/>
+              </a:rPr>
+              <a:t>;</a:t>
+            </a:r>
+          </a:p>
+          <a:p>
+            <a:pPr marL="285750" marR="32385" indent="-285750" algn="just">
+              <a:buSzPts val="1400"/>
               <a:buFont typeface="Symbol" panose="05050102010706020507" pitchFamily="18" charset="2"/>
-              <a:buChar char=""/>
+              <a:buChar char="-"/>
+              <a:tabLst>
+                <a:tab pos="630555" algn="l"/>
+              </a:tabLst>
             </a:pPr>
             <a:r>
               <a:rPr lang="uk-UA" sz="1800" dirty="0">
                 <a:latin typeface="Times New Roman" panose="02020603050405020304" pitchFamily="18" charset="0"/>
-                <a:ea typeface="Calibri" panose="020F0502020204030204" pitchFamily="34" charset="0"/>
-                <a:cs typeface="Times New Roman" panose="02020603050405020304" pitchFamily="18" charset="0"/>
-              </a:rPr>
-              <a:t>досліджено сучасні </a:t>
-            </a:r>
-            <a:r>
-              <a:rPr lang="uk-UA" sz="1800" dirty="0" err="1">
-                <a:latin typeface="Times New Roman" panose="02020603050405020304" pitchFamily="18" charset="0"/>
-                <a:ea typeface="Calibri" panose="020F0502020204030204" pitchFamily="34" charset="0"/>
-                <a:cs typeface="Times New Roman" panose="02020603050405020304" pitchFamily="18" charset="0"/>
-              </a:rPr>
-              <a:t>трансформерні</a:t>
-            </a:r>
+                <a:ea typeface="Times New Roman" panose="02020603050405020304" pitchFamily="18" charset="0"/>
+              </a:rPr>
+              <a:t>розробка програмного додатку;</a:t>
+            </a:r>
+          </a:p>
+          <a:p>
+            <a:pPr marL="285750" marR="32385" indent="-285750" algn="just">
+              <a:buSzPts val="1400"/>
+              <a:buFont typeface="Symbol" panose="05050102010706020507" pitchFamily="18" charset="2"/>
+              <a:buChar char="-"/>
+              <a:tabLst>
+                <a:tab pos="630555" algn="l"/>
+              </a:tabLst>
+            </a:pPr>
             <a:r>
               <a:rPr lang="uk-UA" sz="1800" dirty="0">
                 <a:latin typeface="Times New Roman" panose="02020603050405020304" pitchFamily="18" charset="0"/>
-                <a:ea typeface="Calibri" panose="020F0502020204030204" pitchFamily="34" charset="0"/>
-                <a:cs typeface="Times New Roman" panose="02020603050405020304" pitchFamily="18" charset="0"/>
-              </a:rPr>
-              <a:t> архітектури;</a:t>
-            </a:r>
-            <a:endParaRPr lang="en-US" sz="1800" dirty="0">
-              <a:latin typeface="Times New Roman" panose="02020603050405020304" pitchFamily="18" charset="0"/>
-              <a:ea typeface="Calibri" panose="020F0502020204030204" pitchFamily="34" charset="0"/>
-              <a:cs typeface="Times New Roman" panose="02020603050405020304" pitchFamily="18" charset="0"/>
-            </a:endParaRPr>
-          </a:p>
-          <a:p>
-            <a:pPr marL="426720" indent="-285750" algn="just">
+                <a:ea typeface="Times New Roman" panose="02020603050405020304" pitchFamily="18" charset="0"/>
+              </a:rPr>
+              <a:t>експериментальне дослідження;</a:t>
+            </a:r>
+          </a:p>
+          <a:p>
+            <a:pPr marL="285750" marR="32385" indent="-285750" algn="just">
+              <a:buSzPts val="1400"/>
               <a:buFont typeface="Symbol" panose="05050102010706020507" pitchFamily="18" charset="2"/>
-              <a:buChar char=""/>
+              <a:buChar char="-"/>
+              <a:tabLst>
+                <a:tab pos="630555" algn="l"/>
+              </a:tabLst>
             </a:pPr>
             <a:r>
               <a:rPr lang="uk-UA" sz="1800" dirty="0">
                 <a:latin typeface="Times New Roman" panose="02020603050405020304" pitchFamily="18" charset="0"/>
-                <a:ea typeface="Calibri" panose="020F0502020204030204" pitchFamily="34" charset="0"/>
-                <a:cs typeface="Times New Roman" panose="02020603050405020304" pitchFamily="18" charset="0"/>
-              </a:rPr>
-              <a:t>виконано порівняльний аналіз моделей </a:t>
-            </a:r>
-            <a:r>
-              <a:rPr lang="en-US" sz="1800" dirty="0" err="1">
-                <a:latin typeface="Times New Roman" panose="02020603050405020304" pitchFamily="18" charset="0"/>
-                <a:ea typeface="Calibri" panose="020F0502020204030204" pitchFamily="34" charset="0"/>
-                <a:cs typeface="Times New Roman" panose="02020603050405020304" pitchFamily="18" charset="0"/>
-              </a:rPr>
-              <a:t>SASRec</a:t>
-            </a:r>
-            <a:r>
-              <a:rPr lang="en-US" sz="1800" dirty="0">
-                <a:latin typeface="Times New Roman" panose="02020603050405020304" pitchFamily="18" charset="0"/>
-                <a:ea typeface="Calibri" panose="020F0502020204030204" pitchFamily="34" charset="0"/>
-                <a:cs typeface="Times New Roman" panose="02020603050405020304" pitchFamily="18" charset="0"/>
-              </a:rPr>
-              <a:t>, BERT4Rec </a:t>
-            </a:r>
-            <a:r>
-              <a:rPr lang="uk-UA" sz="1800" dirty="0">
-                <a:latin typeface="Times New Roman" panose="02020603050405020304" pitchFamily="18" charset="0"/>
-                <a:ea typeface="Calibri" panose="020F0502020204030204" pitchFamily="34" charset="0"/>
-                <a:cs typeface="Times New Roman" panose="02020603050405020304" pitchFamily="18" charset="0"/>
-              </a:rPr>
-              <a:t>та </a:t>
-            </a:r>
-            <a:r>
-              <a:rPr lang="en-US" sz="1800" dirty="0">
-                <a:latin typeface="Times New Roman" panose="02020603050405020304" pitchFamily="18" charset="0"/>
-                <a:ea typeface="Calibri" panose="020F0502020204030204" pitchFamily="34" charset="0"/>
-                <a:cs typeface="Times New Roman" panose="02020603050405020304" pitchFamily="18" charset="0"/>
-              </a:rPr>
-              <a:t>S³-Rec</a:t>
-            </a:r>
-            <a:r>
-              <a:rPr lang="ru-RU" sz="1800" dirty="0">
-                <a:latin typeface="Times New Roman" panose="02020603050405020304" pitchFamily="18" charset="0"/>
-                <a:ea typeface="Calibri" panose="020F0502020204030204" pitchFamily="34" charset="0"/>
-                <a:cs typeface="Times New Roman" panose="02020603050405020304" pitchFamily="18" charset="0"/>
-              </a:rPr>
-              <a:t>;</a:t>
-            </a:r>
-            <a:endParaRPr lang="en-US" sz="1800" dirty="0">
-              <a:latin typeface="Times New Roman" panose="02020603050405020304" pitchFamily="18" charset="0"/>
-              <a:ea typeface="Calibri" panose="020F0502020204030204" pitchFamily="34" charset="0"/>
-              <a:cs typeface="Times New Roman" panose="02020603050405020304" pitchFamily="18" charset="0"/>
-            </a:endParaRPr>
-          </a:p>
-          <a:p>
-            <a:pPr marL="426720" indent="-285750" algn="just">
+                <a:ea typeface="Times New Roman" panose="02020603050405020304" pitchFamily="18" charset="0"/>
+              </a:rPr>
+              <a:t>аналіз отриманих результатів.</a:t>
+            </a:r>
+          </a:p>
+          <a:p>
+            <a:pPr marL="285750" marR="32385" indent="-285750" algn="just">
+              <a:buSzPts val="1400"/>
               <a:buFont typeface="Symbol" panose="05050102010706020507" pitchFamily="18" charset="2"/>
-              <a:buChar char=""/>
-            </a:pPr>
-            <a:r>
-              <a:rPr lang="uk-UA" sz="1800" dirty="0">
-                <a:latin typeface="Times New Roman" panose="02020603050405020304" pitchFamily="18" charset="0"/>
-                <a:ea typeface="Calibri" panose="020F0502020204030204" pitchFamily="34" charset="0"/>
-                <a:cs typeface="Times New Roman" panose="02020603050405020304" pitchFamily="18" charset="0"/>
-              </a:rPr>
-              <a:t>встановлено переваги </a:t>
-            </a:r>
-            <a:r>
-              <a:rPr lang="uk-UA" sz="1800" dirty="0" err="1">
-                <a:latin typeface="Times New Roman" panose="02020603050405020304" pitchFamily="18" charset="0"/>
-                <a:ea typeface="Calibri" panose="020F0502020204030204" pitchFamily="34" charset="0"/>
-                <a:cs typeface="Times New Roman" panose="02020603050405020304" pitchFamily="18" charset="0"/>
-              </a:rPr>
-              <a:t>трансформерних</a:t>
-            </a:r>
-            <a:r>
-              <a:rPr lang="uk-UA" sz="1800" dirty="0">
-                <a:latin typeface="Times New Roman" panose="02020603050405020304" pitchFamily="18" charset="0"/>
-                <a:ea typeface="Calibri" panose="020F0502020204030204" pitchFamily="34" charset="0"/>
-                <a:cs typeface="Times New Roman" panose="02020603050405020304" pitchFamily="18" charset="0"/>
-              </a:rPr>
-              <a:t> моделей над традиційними підходами;</a:t>
-            </a:r>
-            <a:endParaRPr lang="en-US" sz="1800" dirty="0">
-              <a:latin typeface="Times New Roman" panose="02020603050405020304" pitchFamily="18" charset="0"/>
-              <a:ea typeface="Calibri" panose="020F0502020204030204" pitchFamily="34" charset="0"/>
-              <a:cs typeface="Times New Roman" panose="02020603050405020304" pitchFamily="18" charset="0"/>
-            </a:endParaRPr>
-          </a:p>
-          <a:p>
-            <a:pPr marL="426720" indent="-285750" algn="just">
-              <a:buFont typeface="Symbol" panose="05050102010706020507" pitchFamily="18" charset="2"/>
-              <a:buChar char=""/>
-            </a:pPr>
-            <a:r>
-              <a:rPr lang="uk-UA" sz="1800" dirty="0">
-                <a:latin typeface="Times New Roman" panose="02020603050405020304" pitchFamily="18" charset="0"/>
-                <a:ea typeface="Calibri" panose="020F0502020204030204" pitchFamily="34" charset="0"/>
-                <a:cs typeface="Times New Roman" panose="02020603050405020304" pitchFamily="18" charset="0"/>
-              </a:rPr>
-              <a:t>визначено компроміс між якістю рекомендацій та обчислювальними витратами;</a:t>
-            </a:r>
-            <a:endParaRPr lang="en-US" sz="1800" dirty="0">
-              <a:latin typeface="Times New Roman" panose="02020603050405020304" pitchFamily="18" charset="0"/>
-              <a:ea typeface="Calibri" panose="020F0502020204030204" pitchFamily="34" charset="0"/>
-              <a:cs typeface="Times New Roman" panose="02020603050405020304" pitchFamily="18" charset="0"/>
-            </a:endParaRPr>
-          </a:p>
-          <a:p>
-            <a:pPr marL="426720" indent="-285750" algn="just">
-              <a:buFont typeface="Symbol" panose="05050102010706020507" pitchFamily="18" charset="2"/>
-              <a:buChar char=""/>
-            </a:pPr>
-            <a:r>
-              <a:rPr lang="uk-UA" sz="1800" dirty="0">
-                <a:latin typeface="Times New Roman" panose="02020603050405020304" pitchFamily="18" charset="0"/>
-                <a:ea typeface="Calibri" panose="020F0502020204030204" pitchFamily="34" charset="0"/>
-                <a:cs typeface="Times New Roman" panose="02020603050405020304" pitchFamily="18" charset="0"/>
-              </a:rPr>
-              <a:t>найбільш ефективними виявилися </a:t>
-            </a:r>
-            <a:r>
-              <a:rPr lang="en-US" sz="1800" dirty="0">
-                <a:latin typeface="Times New Roman" panose="02020603050405020304" pitchFamily="18" charset="0"/>
-                <a:ea typeface="Calibri" panose="020F0502020204030204" pitchFamily="34" charset="0"/>
-                <a:cs typeface="Times New Roman" panose="02020603050405020304" pitchFamily="18" charset="0"/>
-              </a:rPr>
-              <a:t>self-supervised </a:t>
-            </a:r>
-            <a:r>
-              <a:rPr lang="uk-UA" sz="1800" dirty="0">
-                <a:latin typeface="Times New Roman" panose="02020603050405020304" pitchFamily="18" charset="0"/>
-                <a:ea typeface="Calibri" panose="020F0502020204030204" pitchFamily="34" charset="0"/>
-                <a:cs typeface="Times New Roman" panose="02020603050405020304" pitchFamily="18" charset="0"/>
-              </a:rPr>
-              <a:t>та двосторонні </a:t>
-            </a:r>
-            <a:r>
-              <a:rPr lang="uk-UA" sz="1800" dirty="0" err="1">
-                <a:latin typeface="Times New Roman" panose="02020603050405020304" pitchFamily="18" charset="0"/>
-                <a:ea typeface="Calibri" panose="020F0502020204030204" pitchFamily="34" charset="0"/>
-                <a:cs typeface="Times New Roman" panose="02020603050405020304" pitchFamily="18" charset="0"/>
-              </a:rPr>
-              <a:t>трансформерні</a:t>
-            </a:r>
-            <a:r>
-              <a:rPr lang="uk-UA" sz="1800" dirty="0">
-                <a:latin typeface="Times New Roman" panose="02020603050405020304" pitchFamily="18" charset="0"/>
-                <a:ea typeface="Calibri" panose="020F0502020204030204" pitchFamily="34" charset="0"/>
-                <a:cs typeface="Times New Roman" panose="02020603050405020304" pitchFamily="18" charset="0"/>
-              </a:rPr>
-              <a:t> підходи;</a:t>
-            </a:r>
-          </a:p>
-          <a:p>
-            <a:pPr marL="426720" indent="-285750" algn="just">
-              <a:buFont typeface="Symbol" panose="05050102010706020507" pitchFamily="18" charset="2"/>
-              <a:buChar char=""/>
+              <a:buChar char="-"/>
+              <a:tabLst>
+                <a:tab pos="630555" algn="l"/>
+              </a:tabLst>
             </a:pPr>
             <a:r>
               <a:rPr lang="uk-UA" sz="1800" dirty="0">
@@ -13411,6 +13560,36 @@
           <a:ln>
             <a:noFill/>
           </a:ln>
+        </p:spPr>
+      </p:pic>
+      <p:pic>
+        <p:nvPicPr>
+          <p:cNvPr id="5" name="image4.jpg">
+            <a:extLst>
+              <a:ext uri="{FF2B5EF4-FFF2-40B4-BE49-F238E27FC236}">
+                <a16:creationId xmlns:a16="http://schemas.microsoft.com/office/drawing/2014/main" id="{DD56BA0C-CFE4-64FD-E945-D7CFE0EF54DA}"/>
+              </a:ext>
+            </a:extLst>
+          </p:cNvPr>
+          <p:cNvPicPr/>
+          <p:nvPr/>
+        </p:nvPicPr>
+        <p:blipFill>
+          <a:blip r:embed="rId4"/>
+          <a:srcRect t="6200"/>
+          <a:stretch>
+            <a:fillRect/>
+          </a:stretch>
+        </p:blipFill>
+        <p:spPr>
+          <a:xfrm>
+            <a:off x="5421082" y="716745"/>
+            <a:ext cx="3256266" cy="4202793"/>
+          </a:xfrm>
+          <a:prstGeom prst="rect">
+            <a:avLst/>
+          </a:prstGeom>
+          <a:ln/>
         </p:spPr>
       </p:pic>
     </p:spTree>
@@ -16694,7 +16873,7 @@
           <a:p>
             <a:r>
               <a:rPr lang="en-US" sz="2000" dirty="0"/>
-              <a:t>Python 3.12, Django 6.0., </a:t>
+              <a:t>Python 3.12, </a:t>
             </a:r>
             <a:r>
               <a:rPr lang="en-US" sz="2000" dirty="0" err="1"/>
@@ -16948,8 +17127,8 @@
         </p:nvSpPr>
         <p:spPr>
           <a:xfrm>
-            <a:off x="497458" y="1146173"/>
-            <a:ext cx="8334842" cy="3179762"/>
+            <a:off x="185401" y="906687"/>
+            <a:ext cx="3385112" cy="3179762"/>
           </a:xfrm>
           <a:prstGeom prst="rect">
             <a:avLst/>
@@ -16965,20 +17144,20 @@
               <a:buNone/>
             </a:pPr>
             <a:r>
-              <a:rPr lang="af-ZA" b="1" dirty="0">
+              <a:rPr lang="af-ZA" sz="1200" b="1" dirty="0">
                 <a:latin typeface="Times New Roman" panose="02020603050405020304" pitchFamily="18" charset="0"/>
                 <a:cs typeface="Times New Roman" panose="02020603050405020304" pitchFamily="18" charset="0"/>
               </a:rPr>
               <a:t>Amazon (Beauty, Sports, Toys)</a:t>
             </a:r>
             <a:r>
-              <a:rPr lang="ru-RU" b="1" dirty="0">
+              <a:rPr lang="ru-RU" sz="1200" b="1" dirty="0">
                 <a:latin typeface="Times New Roman" panose="02020603050405020304" pitchFamily="18" charset="0"/>
                 <a:cs typeface="Times New Roman" panose="02020603050405020304" pitchFamily="18" charset="0"/>
               </a:rPr>
               <a:t>:</a:t>
             </a:r>
-            <a:endParaRPr lang="af-ZA" b="1" dirty="0">
+            <a:endParaRPr lang="af-ZA" sz="1200" b="1" dirty="0">
               <a:latin typeface="Times New Roman" panose="02020603050405020304" pitchFamily="18" charset="0"/>
               <a:cs typeface="Times New Roman" panose="02020603050405020304" pitchFamily="18" charset="0"/>
             </a:endParaRPr>
@@ -16989,41 +17168,41 @@
               <a:buChar char="-"/>
             </a:pPr>
             <a:r>
-              <a:rPr lang="af-ZA" dirty="0">
+              <a:rPr lang="af-ZA" sz="1200" dirty="0">
                 <a:latin typeface="Times New Roman" panose="02020603050405020304" pitchFamily="18" charset="0"/>
                 <a:cs typeface="Times New Roman" panose="02020603050405020304" pitchFamily="18" charset="0"/>
               </a:rPr>
               <a:t>e-commerce </a:t>
             </a:r>
             <a:r>
-              <a:rPr lang="uk-UA" dirty="0" err="1">
+              <a:rPr lang="uk-UA" sz="1200" dirty="0" err="1">
                 <a:latin typeface="Times New Roman" panose="02020603050405020304" pitchFamily="18" charset="0"/>
                 <a:cs typeface="Times New Roman" panose="02020603050405020304" pitchFamily="18" charset="0"/>
               </a:rPr>
               <a:t>датасети</a:t>
             </a:r>
             <a:r>
-              <a:rPr lang="uk-UA" dirty="0">
+              <a:rPr lang="uk-UA" sz="1200" dirty="0">
                 <a:latin typeface="Times New Roman" panose="02020603050405020304" pitchFamily="18" charset="0"/>
                 <a:cs typeface="Times New Roman" panose="02020603050405020304" pitchFamily="18" charset="0"/>
               </a:rPr>
               <a:t> </a:t>
             </a:r>
             <a:r>
-              <a:rPr lang="af-ZA" dirty="0">
+              <a:rPr lang="af-ZA" sz="1200" dirty="0">
                 <a:latin typeface="Times New Roman" panose="02020603050405020304" pitchFamily="18" charset="0"/>
                 <a:cs typeface="Times New Roman" panose="02020603050405020304" pitchFamily="18" charset="0"/>
               </a:rPr>
               <a:t>Amazon</a:t>
             </a:r>
             <a:r>
-              <a:rPr lang="ru-RU" dirty="0">
+              <a:rPr lang="ru-RU" sz="1200" dirty="0">
                 <a:latin typeface="Times New Roman" panose="02020603050405020304" pitchFamily="18" charset="0"/>
                 <a:cs typeface="Times New Roman" panose="02020603050405020304" pitchFamily="18" charset="0"/>
               </a:rPr>
               <a:t>;</a:t>
             </a:r>
-            <a:endParaRPr lang="af-ZA" dirty="0">
+            <a:endParaRPr lang="af-ZA" sz="1200" dirty="0">
               <a:latin typeface="Times New Roman" panose="02020603050405020304" pitchFamily="18" charset="0"/>
               <a:cs typeface="Times New Roman" panose="02020603050405020304" pitchFamily="18" charset="0"/>
             </a:endParaRPr>
@@ -17034,7 +17213,7 @@
               <a:buChar char="-"/>
             </a:pPr>
             <a:r>
-              <a:rPr lang="uk-UA" dirty="0">
+              <a:rPr lang="uk-UA" sz="1200" dirty="0">
                 <a:latin typeface="Times New Roman" panose="02020603050405020304" pitchFamily="18" charset="0"/>
                 <a:cs typeface="Times New Roman" panose="02020603050405020304" pitchFamily="18" charset="0"/>
               </a:rPr>
@@ -17047,7 +17226,7 @@
               <a:buChar char="-"/>
             </a:pPr>
             <a:r>
-              <a:rPr lang="uk-UA" dirty="0">
+              <a:rPr lang="uk-UA" sz="1200" dirty="0">
                 <a:latin typeface="Times New Roman" panose="02020603050405020304" pitchFamily="18" charset="0"/>
                 <a:cs typeface="Times New Roman" panose="02020603050405020304" pitchFamily="18" charset="0"/>
               </a:rPr>
@@ -17060,7 +17239,7 @@
               <a:buChar char="-"/>
             </a:pPr>
             <a:r>
-              <a:rPr lang="uk-UA" dirty="0">
+              <a:rPr lang="uk-UA" sz="1200" dirty="0">
                 <a:latin typeface="Times New Roman" panose="02020603050405020304" pitchFamily="18" charset="0"/>
                 <a:cs typeface="Times New Roman" panose="02020603050405020304" pitchFamily="18" charset="0"/>
               </a:rPr>
@@ -17071,96 +17250,7 @@
             <a:pPr marL="114300" indent="0">
               <a:buNone/>
             </a:pPr>
-            <a:r>
-              <a:rPr lang="af-ZA" b="1" dirty="0">
-                <a:latin typeface="Times New Roman" panose="02020603050405020304" pitchFamily="18" charset="0"/>
-                <a:cs typeface="Times New Roman" panose="02020603050405020304" pitchFamily="18" charset="0"/>
-              </a:rPr>
-              <a:t>S</a:t>
-            </a:r>
-            <a:r>
-              <a:rPr lang="en-US" b="1" dirty="0">
-                <a:latin typeface="Times New Roman" panose="02020603050405020304" pitchFamily="18" charset="0"/>
-                <a:cs typeface="Times New Roman" panose="02020603050405020304" pitchFamily="18" charset="0"/>
-              </a:rPr>
-              <a:t>team</a:t>
-            </a:r>
-            <a:r>
-              <a:rPr lang="ru-RU" b="1" dirty="0">
-                <a:latin typeface="Times New Roman" panose="02020603050405020304" pitchFamily="18" charset="0"/>
-                <a:cs typeface="Times New Roman" panose="02020603050405020304" pitchFamily="18" charset="0"/>
-              </a:rPr>
-              <a:t>:</a:t>
-            </a:r>
-            <a:endParaRPr lang="af-ZA" b="1" dirty="0">
-              <a:latin typeface="Times New Roman" panose="02020603050405020304" pitchFamily="18" charset="0"/>
-              <a:cs typeface="Times New Roman" panose="02020603050405020304" pitchFamily="18" charset="0"/>
-            </a:endParaRPr>
-          </a:p>
-          <a:p>
-            <a:pPr>
-              <a:buFont typeface="Symbol" panose="05050102010706020507" pitchFamily="18" charset="2"/>
-              <a:buChar char="-"/>
-            </a:pPr>
-            <a:r>
-              <a:rPr lang="uk-UA" dirty="0">
-                <a:latin typeface="Times New Roman" panose="02020603050405020304" pitchFamily="18" charset="0"/>
-                <a:cs typeface="Times New Roman" panose="02020603050405020304" pitchFamily="18" charset="0"/>
-              </a:rPr>
-              <a:t>взаємодії користувачів з іграми;</a:t>
-            </a:r>
-            <a:endParaRPr lang="en-US" dirty="0">
-              <a:latin typeface="Times New Roman" panose="02020603050405020304" pitchFamily="18" charset="0"/>
-              <a:cs typeface="Times New Roman" panose="02020603050405020304" pitchFamily="18" charset="0"/>
-            </a:endParaRPr>
-          </a:p>
-          <a:p>
-            <a:pPr>
-              <a:buFont typeface="Symbol" panose="05050102010706020507" pitchFamily="18" charset="2"/>
-              <a:buChar char="-"/>
-            </a:pPr>
-            <a:r>
-              <a:rPr lang="uk-UA" dirty="0">
-                <a:latin typeface="Times New Roman" panose="02020603050405020304" pitchFamily="18" charset="0"/>
-                <a:cs typeface="Times New Roman" panose="02020603050405020304" pitchFamily="18" charset="0"/>
-              </a:rPr>
-              <a:t>довгі поведінкові послідовності;</a:t>
-            </a:r>
-            <a:endParaRPr lang="en-US" dirty="0">
-              <a:latin typeface="Times New Roman" panose="02020603050405020304" pitchFamily="18" charset="0"/>
-              <a:cs typeface="Times New Roman" panose="02020603050405020304" pitchFamily="18" charset="0"/>
-            </a:endParaRPr>
-          </a:p>
-          <a:p>
-            <a:pPr>
-              <a:buFont typeface="Symbol" panose="05050102010706020507" pitchFamily="18" charset="2"/>
-              <a:buChar char="-"/>
-            </a:pPr>
-            <a:r>
-              <a:rPr lang="uk-UA" dirty="0">
-                <a:latin typeface="Times New Roman" panose="02020603050405020304" pitchFamily="18" charset="0"/>
-                <a:cs typeface="Times New Roman" panose="02020603050405020304" pitchFamily="18" charset="0"/>
-              </a:rPr>
-              <a:t>динамічна зміна інтересів;</a:t>
-            </a:r>
-            <a:endParaRPr lang="en-US" dirty="0">
-              <a:latin typeface="Times New Roman" panose="02020603050405020304" pitchFamily="18" charset="0"/>
-              <a:cs typeface="Times New Roman" panose="02020603050405020304" pitchFamily="18" charset="0"/>
-            </a:endParaRPr>
-          </a:p>
-          <a:p>
-            <a:pPr>
-              <a:buFont typeface="Symbol" panose="05050102010706020507" pitchFamily="18" charset="2"/>
-              <a:buChar char="-"/>
-            </a:pPr>
-            <a:r>
-              <a:rPr lang="uk-UA" dirty="0">
-                <a:latin typeface="Times New Roman" panose="02020603050405020304" pitchFamily="18" charset="0"/>
-                <a:cs typeface="Times New Roman" panose="02020603050405020304" pitchFamily="18" charset="0"/>
-              </a:rPr>
-              <a:t>аналіз якості персоналізації.</a:t>
-            </a:r>
-            <a:endParaRPr lang="en-US" dirty="0">
+            <a:endParaRPr lang="en-US" sz="1400" dirty="0">
               <a:latin typeface="Times New Roman" panose="02020603050405020304" pitchFamily="18" charset="0"/>
               <a:cs typeface="Times New Roman" panose="02020603050405020304" pitchFamily="18" charset="0"/>
             </a:endParaRPr>
@@ -17181,8 +17271,8 @@
         </p:nvSpPr>
         <p:spPr>
           <a:xfrm>
-            <a:off x="5025542" y="1207346"/>
-            <a:ext cx="3262579" cy="2215991"/>
+            <a:off x="6089304" y="958290"/>
+            <a:ext cx="3262579" cy="1200329"/>
           </a:xfrm>
           <a:prstGeom prst="rect">
             <a:avLst/>
@@ -17196,20 +17286,20 @@
           <a:lstStyle/>
           <a:p>
             <a:r>
-              <a:rPr lang="af-ZA" sz="1800" b="1" dirty="0">
+              <a:rPr lang="af-ZA" sz="1200" b="1" dirty="0">
                 <a:latin typeface="Times New Roman" panose="02020603050405020304" pitchFamily="18" charset="0"/>
                 <a:cs typeface="Times New Roman" panose="02020603050405020304" pitchFamily="18" charset="0"/>
               </a:rPr>
               <a:t>Yelp</a:t>
             </a:r>
             <a:r>
-              <a:rPr lang="ru-RU" sz="1800" b="1" dirty="0">
+              <a:rPr lang="ru-RU" sz="1200" b="1" dirty="0">
                 <a:latin typeface="Times New Roman" panose="02020603050405020304" pitchFamily="18" charset="0"/>
                 <a:cs typeface="Times New Roman" panose="02020603050405020304" pitchFamily="18" charset="0"/>
               </a:rPr>
               <a:t>:</a:t>
             </a:r>
-            <a:endParaRPr lang="af-ZA" sz="1800" b="1" dirty="0">
+            <a:endParaRPr lang="af-ZA" sz="1200" b="1" dirty="0">
               <a:latin typeface="Times New Roman" panose="02020603050405020304" pitchFamily="18" charset="0"/>
               <a:cs typeface="Times New Roman" panose="02020603050405020304" pitchFamily="18" charset="0"/>
             </a:endParaRPr>
@@ -17220,7 +17310,7 @@
               <a:buChar char="-"/>
             </a:pPr>
             <a:r>
-              <a:rPr lang="uk-UA" sz="1800" dirty="0">
+              <a:rPr lang="uk-UA" sz="1200" dirty="0">
                 <a:latin typeface="Times New Roman" panose="02020603050405020304" pitchFamily="18" charset="0"/>
                 <a:cs typeface="Times New Roman" panose="02020603050405020304" pitchFamily="18" charset="0"/>
               </a:rPr>
@@ -17233,7 +17323,7 @@
               <a:buChar char="-"/>
             </a:pPr>
             <a:r>
-              <a:rPr lang="uk-UA" sz="1800" dirty="0">
+              <a:rPr lang="uk-UA" sz="1200" dirty="0">
                 <a:latin typeface="Times New Roman" panose="02020603050405020304" pitchFamily="18" charset="0"/>
                 <a:cs typeface="Times New Roman" panose="02020603050405020304" pitchFamily="18" charset="0"/>
               </a:rPr>
@@ -17246,7 +17336,7 @@
               <a:buChar char="-"/>
             </a:pPr>
             <a:r>
-              <a:rPr lang="uk-UA" sz="1800" dirty="0">
+              <a:rPr lang="uk-UA" sz="1200" dirty="0">
                 <a:latin typeface="Times New Roman" panose="02020603050405020304" pitchFamily="18" charset="0"/>
                 <a:cs typeface="Times New Roman" panose="02020603050405020304" pitchFamily="18" charset="0"/>
               </a:rPr>
@@ -17259,7 +17349,7 @@
               <a:buChar char="-"/>
             </a:pPr>
             <a:r>
-              <a:rPr lang="uk-UA" sz="1800" dirty="0">
+              <a:rPr lang="uk-UA" sz="1200" dirty="0">
                 <a:latin typeface="Times New Roman" panose="02020603050405020304" pitchFamily="18" charset="0"/>
                 <a:cs typeface="Times New Roman" panose="02020603050405020304" pitchFamily="18" charset="0"/>
               </a:rPr>
@@ -17348,8 +17438,8 @@
         </p:nvCxnSpPr>
         <p:spPr>
           <a:xfrm>
-            <a:off x="4829908" y="1232085"/>
-            <a:ext cx="0" cy="3218688"/>
+            <a:off x="6012822" y="958290"/>
+            <a:ext cx="0" cy="1131767"/>
           </a:xfrm>
           <a:prstGeom prst="line">
             <a:avLst/>
@@ -17402,6 +17492,483 @@
           <a:ln>
             <a:noFill/>
           </a:ln>
+        </p:spPr>
+      </p:pic>
+      <p:sp>
+        <p:nvSpPr>
+          <p:cNvPr id="2" name="Google Shape;114;p20">
+            <a:extLst>
+              <a:ext uri="{FF2B5EF4-FFF2-40B4-BE49-F238E27FC236}">
+                <a16:creationId xmlns:a16="http://schemas.microsoft.com/office/drawing/2014/main" id="{528E0236-7095-35AE-B752-7E9EFBC47141}"/>
+              </a:ext>
+            </a:extLst>
+          </p:cNvPr>
+          <p:cNvSpPr txBox="1">
+            <a:spLocks/>
+          </p:cNvSpPr>
+          <p:nvPr/>
+        </p:nvSpPr>
+        <p:spPr>
+          <a:xfrm>
+            <a:off x="3155186" y="906687"/>
+            <a:ext cx="3740712" cy="3179762"/>
+          </a:xfrm>
+          <a:prstGeom prst="rect">
+            <a:avLst/>
+          </a:prstGeom>
+          <a:noFill/>
+          <a:ln>
+            <a:noFill/>
+          </a:ln>
+        </p:spPr>
+        <p:txBody>
+          <a:bodyPr spcFirstLastPara="1" wrap="square" lIns="91425" tIns="91425" rIns="91425" bIns="91425" anchor="t" anchorCtr="0">
+            <a:noAutofit/>
+          </a:bodyPr>
+          <a:lstStyle>
+            <a:defPPr marR="0" lvl="0" algn="l" rtl="0">
+              <a:lnSpc>
+                <a:spcPct val="100000"/>
+              </a:lnSpc>
+              <a:spcBef>
+                <a:spcPts val="0"/>
+              </a:spcBef>
+              <a:spcAft>
+                <a:spcPts val="0"/>
+              </a:spcAft>
+            </a:defPPr>
+            <a:lvl1pPr marL="457200" marR="0" lvl="0" indent="-342900" algn="l" rtl="0">
+              <a:lnSpc>
+                <a:spcPct val="115000"/>
+              </a:lnSpc>
+              <a:spcBef>
+                <a:spcPts val="0"/>
+              </a:spcBef>
+              <a:spcAft>
+                <a:spcPts val="0"/>
+              </a:spcAft>
+              <a:buClr>
+                <a:schemeClr val="dk1"/>
+              </a:buClr>
+              <a:buSzPts val="1800"/>
+              <a:buFont typeface="Open Sans"/>
+              <a:buChar char="●"/>
+              <a:defRPr sz="1800" b="0" i="0" u="none" strike="noStrike" cap="none">
+                <a:solidFill>
+                  <a:schemeClr val="dk1"/>
+                </a:solidFill>
+                <a:latin typeface="Open Sans"/>
+                <a:ea typeface="Open Sans"/>
+                <a:cs typeface="Open Sans"/>
+                <a:sym typeface="Open Sans"/>
+              </a:defRPr>
+            </a:lvl1pPr>
+            <a:lvl2pPr marL="914400" marR="0" lvl="1" indent="-317500" algn="l" rtl="0">
+              <a:lnSpc>
+                <a:spcPct val="115000"/>
+              </a:lnSpc>
+              <a:spcBef>
+                <a:spcPts val="0"/>
+              </a:spcBef>
+              <a:spcAft>
+                <a:spcPts val="0"/>
+              </a:spcAft>
+              <a:buClr>
+                <a:schemeClr val="dk1"/>
+              </a:buClr>
+              <a:buSzPts val="1400"/>
+              <a:buFont typeface="Open Sans"/>
+              <a:buChar char="○"/>
+              <a:defRPr sz="1400" b="0" i="0" u="none" strike="noStrike" cap="none">
+                <a:solidFill>
+                  <a:schemeClr val="dk1"/>
+                </a:solidFill>
+                <a:latin typeface="Open Sans"/>
+                <a:ea typeface="Open Sans"/>
+                <a:cs typeface="Open Sans"/>
+                <a:sym typeface="Open Sans"/>
+              </a:defRPr>
+            </a:lvl2pPr>
+            <a:lvl3pPr marL="1371600" marR="0" lvl="2" indent="-317500" algn="l" rtl="0">
+              <a:lnSpc>
+                <a:spcPct val="115000"/>
+              </a:lnSpc>
+              <a:spcBef>
+                <a:spcPts val="0"/>
+              </a:spcBef>
+              <a:spcAft>
+                <a:spcPts val="0"/>
+              </a:spcAft>
+              <a:buClr>
+                <a:schemeClr val="dk1"/>
+              </a:buClr>
+              <a:buSzPts val="1400"/>
+              <a:buFont typeface="Open Sans"/>
+              <a:buChar char="■"/>
+              <a:defRPr sz="1400" b="0" i="0" u="none" strike="noStrike" cap="none">
+                <a:solidFill>
+                  <a:schemeClr val="dk1"/>
+                </a:solidFill>
+                <a:latin typeface="Open Sans"/>
+                <a:ea typeface="Open Sans"/>
+                <a:cs typeface="Open Sans"/>
+                <a:sym typeface="Open Sans"/>
+              </a:defRPr>
+            </a:lvl3pPr>
+            <a:lvl4pPr marL="1828800" marR="0" lvl="3" indent="-317500" algn="l" rtl="0">
+              <a:lnSpc>
+                <a:spcPct val="115000"/>
+              </a:lnSpc>
+              <a:spcBef>
+                <a:spcPts val="0"/>
+              </a:spcBef>
+              <a:spcAft>
+                <a:spcPts val="0"/>
+              </a:spcAft>
+              <a:buClr>
+                <a:schemeClr val="dk1"/>
+              </a:buClr>
+              <a:buSzPts val="1400"/>
+              <a:buFont typeface="Open Sans"/>
+              <a:buChar char="●"/>
+              <a:defRPr sz="1400" b="0" i="0" u="none" strike="noStrike" cap="none">
+                <a:solidFill>
+                  <a:schemeClr val="dk1"/>
+                </a:solidFill>
+                <a:latin typeface="Open Sans"/>
+                <a:ea typeface="Open Sans"/>
+                <a:cs typeface="Open Sans"/>
+                <a:sym typeface="Open Sans"/>
+              </a:defRPr>
+            </a:lvl4pPr>
+            <a:lvl5pPr marL="2286000" marR="0" lvl="4" indent="-317500" algn="l" rtl="0">
+              <a:lnSpc>
+                <a:spcPct val="115000"/>
+              </a:lnSpc>
+              <a:spcBef>
+                <a:spcPts val="0"/>
+              </a:spcBef>
+              <a:spcAft>
+                <a:spcPts val="0"/>
+              </a:spcAft>
+              <a:buClr>
+                <a:schemeClr val="dk1"/>
+              </a:buClr>
+              <a:buSzPts val="1400"/>
+              <a:buFont typeface="Open Sans"/>
+              <a:buChar char="○"/>
+              <a:defRPr sz="1400" b="0" i="0" u="none" strike="noStrike" cap="none">
+                <a:solidFill>
+                  <a:schemeClr val="dk1"/>
+                </a:solidFill>
+                <a:latin typeface="Open Sans"/>
+                <a:ea typeface="Open Sans"/>
+                <a:cs typeface="Open Sans"/>
+                <a:sym typeface="Open Sans"/>
+              </a:defRPr>
+            </a:lvl5pPr>
+            <a:lvl6pPr marL="2743200" marR="0" lvl="5" indent="-317500" algn="l" rtl="0">
+              <a:lnSpc>
+                <a:spcPct val="115000"/>
+              </a:lnSpc>
+              <a:spcBef>
+                <a:spcPts val="0"/>
+              </a:spcBef>
+              <a:spcAft>
+                <a:spcPts val="0"/>
+              </a:spcAft>
+              <a:buClr>
+                <a:schemeClr val="dk1"/>
+              </a:buClr>
+              <a:buSzPts val="1400"/>
+              <a:buFont typeface="Open Sans"/>
+              <a:buChar char="■"/>
+              <a:defRPr sz="1400" b="0" i="0" u="none" strike="noStrike" cap="none">
+                <a:solidFill>
+                  <a:schemeClr val="dk1"/>
+                </a:solidFill>
+                <a:latin typeface="Open Sans"/>
+                <a:ea typeface="Open Sans"/>
+                <a:cs typeface="Open Sans"/>
+                <a:sym typeface="Open Sans"/>
+              </a:defRPr>
+            </a:lvl6pPr>
+            <a:lvl7pPr marL="3200400" marR="0" lvl="6" indent="-317500" algn="l" rtl="0">
+              <a:lnSpc>
+                <a:spcPct val="115000"/>
+              </a:lnSpc>
+              <a:spcBef>
+                <a:spcPts val="0"/>
+              </a:spcBef>
+              <a:spcAft>
+                <a:spcPts val="0"/>
+              </a:spcAft>
+              <a:buClr>
+                <a:schemeClr val="dk1"/>
+              </a:buClr>
+              <a:buSzPts val="1400"/>
+              <a:buFont typeface="Open Sans"/>
+              <a:buChar char="●"/>
+              <a:defRPr sz="1400" b="0" i="0" u="none" strike="noStrike" cap="none">
+                <a:solidFill>
+                  <a:schemeClr val="dk1"/>
+                </a:solidFill>
+                <a:latin typeface="Open Sans"/>
+                <a:ea typeface="Open Sans"/>
+                <a:cs typeface="Open Sans"/>
+                <a:sym typeface="Open Sans"/>
+              </a:defRPr>
+            </a:lvl7pPr>
+            <a:lvl8pPr marL="3657600" marR="0" lvl="7" indent="-317500" algn="l" rtl="0">
+              <a:lnSpc>
+                <a:spcPct val="115000"/>
+              </a:lnSpc>
+              <a:spcBef>
+                <a:spcPts val="0"/>
+              </a:spcBef>
+              <a:spcAft>
+                <a:spcPts val="0"/>
+              </a:spcAft>
+              <a:buClr>
+                <a:schemeClr val="dk1"/>
+              </a:buClr>
+              <a:buSzPts val="1400"/>
+              <a:buFont typeface="Open Sans"/>
+              <a:buChar char="○"/>
+              <a:defRPr sz="1400" b="0" i="0" u="none" strike="noStrike" cap="none">
+                <a:solidFill>
+                  <a:schemeClr val="dk1"/>
+                </a:solidFill>
+                <a:latin typeface="Open Sans"/>
+                <a:ea typeface="Open Sans"/>
+                <a:cs typeface="Open Sans"/>
+                <a:sym typeface="Open Sans"/>
+              </a:defRPr>
+            </a:lvl8pPr>
+            <a:lvl9pPr marL="4114800" marR="0" lvl="8" indent="-317500" algn="l" rtl="0">
+              <a:lnSpc>
+                <a:spcPct val="115000"/>
+              </a:lnSpc>
+              <a:spcBef>
+                <a:spcPts val="0"/>
+              </a:spcBef>
+              <a:spcAft>
+                <a:spcPts val="0"/>
+              </a:spcAft>
+              <a:buClr>
+                <a:schemeClr val="dk1"/>
+              </a:buClr>
+              <a:buSzPts val="1400"/>
+              <a:buFont typeface="Open Sans"/>
+              <a:buChar char="■"/>
+              <a:defRPr sz="1400" b="0" i="0" u="none" strike="noStrike" cap="none">
+                <a:solidFill>
+                  <a:schemeClr val="dk1"/>
+                </a:solidFill>
+                <a:latin typeface="Open Sans"/>
+                <a:ea typeface="Open Sans"/>
+                <a:cs typeface="Open Sans"/>
+                <a:sym typeface="Open Sans"/>
+              </a:defRPr>
+            </a:lvl9pPr>
+          </a:lstStyle>
+          <a:p>
+            <a:pPr marL="114300" indent="0">
+              <a:buFont typeface="Open Sans"/>
+              <a:buNone/>
+            </a:pPr>
+            <a:r>
+              <a:rPr lang="af-ZA" sz="1200" b="1" dirty="0">
+                <a:latin typeface="Times New Roman" panose="02020603050405020304" pitchFamily="18" charset="0"/>
+                <a:cs typeface="Times New Roman" panose="02020603050405020304" pitchFamily="18" charset="0"/>
+              </a:rPr>
+              <a:t>S</a:t>
+            </a:r>
+            <a:r>
+              <a:rPr lang="en-US" sz="1200" b="1" dirty="0">
+                <a:latin typeface="Times New Roman" panose="02020603050405020304" pitchFamily="18" charset="0"/>
+                <a:cs typeface="Times New Roman" panose="02020603050405020304" pitchFamily="18" charset="0"/>
+              </a:rPr>
+              <a:t>team</a:t>
+            </a:r>
+            <a:r>
+              <a:rPr lang="ru-RU" sz="1200" b="1" dirty="0">
+                <a:latin typeface="Times New Roman" panose="02020603050405020304" pitchFamily="18" charset="0"/>
+                <a:cs typeface="Times New Roman" panose="02020603050405020304" pitchFamily="18" charset="0"/>
+              </a:rPr>
+              <a:t>:</a:t>
+            </a:r>
+            <a:endParaRPr lang="af-ZA" sz="1200" b="1" dirty="0">
+              <a:latin typeface="Times New Roman" panose="02020603050405020304" pitchFamily="18" charset="0"/>
+              <a:cs typeface="Times New Roman" panose="02020603050405020304" pitchFamily="18" charset="0"/>
+            </a:endParaRPr>
+          </a:p>
+          <a:p>
+            <a:pPr>
+              <a:buFont typeface="Symbol" panose="05050102010706020507" pitchFamily="18" charset="2"/>
+              <a:buChar char="-"/>
+            </a:pPr>
+            <a:r>
+              <a:rPr lang="uk-UA" sz="1200" dirty="0">
+                <a:latin typeface="Times New Roman" panose="02020603050405020304" pitchFamily="18" charset="0"/>
+                <a:cs typeface="Times New Roman" panose="02020603050405020304" pitchFamily="18" charset="0"/>
+              </a:rPr>
+              <a:t>взаємодії користувачів з іграми;</a:t>
+            </a:r>
+            <a:endParaRPr lang="en-US" sz="1200" dirty="0">
+              <a:latin typeface="Times New Roman" panose="02020603050405020304" pitchFamily="18" charset="0"/>
+              <a:cs typeface="Times New Roman" panose="02020603050405020304" pitchFamily="18" charset="0"/>
+            </a:endParaRPr>
+          </a:p>
+          <a:p>
+            <a:pPr>
+              <a:buFont typeface="Symbol" panose="05050102010706020507" pitchFamily="18" charset="2"/>
+              <a:buChar char="-"/>
+            </a:pPr>
+            <a:r>
+              <a:rPr lang="uk-UA" sz="1200" dirty="0">
+                <a:latin typeface="Times New Roman" panose="02020603050405020304" pitchFamily="18" charset="0"/>
+                <a:cs typeface="Times New Roman" panose="02020603050405020304" pitchFamily="18" charset="0"/>
+              </a:rPr>
+              <a:t>довгі поведінкові послідовності;</a:t>
+            </a:r>
+            <a:endParaRPr lang="en-US" sz="1200" dirty="0">
+              <a:latin typeface="Times New Roman" panose="02020603050405020304" pitchFamily="18" charset="0"/>
+              <a:cs typeface="Times New Roman" panose="02020603050405020304" pitchFamily="18" charset="0"/>
+            </a:endParaRPr>
+          </a:p>
+          <a:p>
+            <a:pPr>
+              <a:buFont typeface="Symbol" panose="05050102010706020507" pitchFamily="18" charset="2"/>
+              <a:buChar char="-"/>
+            </a:pPr>
+            <a:r>
+              <a:rPr lang="uk-UA" sz="1200" dirty="0">
+                <a:latin typeface="Times New Roman" panose="02020603050405020304" pitchFamily="18" charset="0"/>
+                <a:cs typeface="Times New Roman" panose="02020603050405020304" pitchFamily="18" charset="0"/>
+              </a:rPr>
+              <a:t>динамічна зміна інтересів;</a:t>
+            </a:r>
+            <a:endParaRPr lang="en-US" sz="1200" dirty="0">
+              <a:latin typeface="Times New Roman" panose="02020603050405020304" pitchFamily="18" charset="0"/>
+              <a:cs typeface="Times New Roman" panose="02020603050405020304" pitchFamily="18" charset="0"/>
+            </a:endParaRPr>
+          </a:p>
+          <a:p>
+            <a:pPr>
+              <a:buFont typeface="Symbol" panose="05050102010706020507" pitchFamily="18" charset="2"/>
+              <a:buChar char="-"/>
+            </a:pPr>
+            <a:r>
+              <a:rPr lang="uk-UA" sz="1200" dirty="0">
+                <a:latin typeface="Times New Roman" panose="02020603050405020304" pitchFamily="18" charset="0"/>
+                <a:cs typeface="Times New Roman" panose="02020603050405020304" pitchFamily="18" charset="0"/>
+              </a:rPr>
+              <a:t>аналіз якості персоналізації.</a:t>
+            </a:r>
+            <a:endParaRPr lang="en-US" sz="1200" dirty="0">
+              <a:latin typeface="Times New Roman" panose="02020603050405020304" pitchFamily="18" charset="0"/>
+              <a:cs typeface="Times New Roman" panose="02020603050405020304" pitchFamily="18" charset="0"/>
+            </a:endParaRPr>
+          </a:p>
+        </p:txBody>
+      </p:sp>
+      <p:cxnSp>
+        <p:nvCxnSpPr>
+          <p:cNvPr id="6" name="Straight Connector 9">
+            <a:extLst>
+              <a:ext uri="{FF2B5EF4-FFF2-40B4-BE49-F238E27FC236}">
+                <a16:creationId xmlns:a16="http://schemas.microsoft.com/office/drawing/2014/main" id="{B30796B2-AE83-4611-2F7A-A0EFE9B673A8}"/>
+              </a:ext>
+            </a:extLst>
+          </p:cNvPr>
+          <p:cNvCxnSpPr>
+            <a:cxnSpLocks/>
+          </p:cNvCxnSpPr>
+          <p:nvPr/>
+        </p:nvCxnSpPr>
+        <p:spPr>
+          <a:xfrm>
+            <a:off x="3218822" y="958290"/>
+            <a:ext cx="0" cy="1131767"/>
+          </a:xfrm>
+          <a:prstGeom prst="line">
+            <a:avLst/>
+          </a:prstGeom>
+        </p:spPr>
+        <p:style>
+          <a:lnRef idx="1">
+            <a:schemeClr val="accent1"/>
+          </a:lnRef>
+          <a:fillRef idx="0">
+            <a:schemeClr val="accent1"/>
+          </a:fillRef>
+          <a:effectRef idx="0">
+            <a:schemeClr val="accent1"/>
+          </a:effectRef>
+          <a:fontRef idx="minor">
+            <a:schemeClr val="tx1"/>
+          </a:fontRef>
+        </p:style>
+      </p:cxnSp>
+      <p:pic>
+        <p:nvPicPr>
+          <p:cNvPr id="8" name="Рисунок 7">
+            <a:extLst>
+              <a:ext uri="{FF2B5EF4-FFF2-40B4-BE49-F238E27FC236}">
+                <a16:creationId xmlns:a16="http://schemas.microsoft.com/office/drawing/2014/main" id="{F50389E8-9886-CA16-4975-47FAF1A92F12}"/>
+              </a:ext>
+            </a:extLst>
+          </p:cNvPr>
+          <p:cNvPicPr>
+            <a:picLocks noChangeAspect="1"/>
+          </p:cNvPicPr>
+          <p:nvPr/>
+        </p:nvPicPr>
+        <p:blipFill>
+          <a:blip r:embed="rId4"/>
+          <a:stretch>
+            <a:fillRect/>
+          </a:stretch>
+        </p:blipFill>
+        <p:spPr>
+          <a:xfrm>
+            <a:off x="1132995" y="2210222"/>
+            <a:ext cx="6878010" cy="2676899"/>
+          </a:xfrm>
+          <a:prstGeom prst="rect">
+            <a:avLst/>
+          </a:prstGeom>
+        </p:spPr>
+      </p:pic>
+      <p:pic>
+        <p:nvPicPr>
+          <p:cNvPr id="12" name="Рисунок 11">
+            <a:extLst>
+              <a:ext uri="{FF2B5EF4-FFF2-40B4-BE49-F238E27FC236}">
+                <a16:creationId xmlns:a16="http://schemas.microsoft.com/office/drawing/2014/main" id="{CBF9D1C9-DAB4-B6B2-6108-CDFE7F2C0EC4}"/>
+              </a:ext>
+            </a:extLst>
+          </p:cNvPr>
+          <p:cNvPicPr>
+            <a:picLocks noChangeAspect="1"/>
+          </p:cNvPicPr>
+          <p:nvPr/>
+        </p:nvPicPr>
+        <p:blipFill>
+          <a:blip r:embed="rId5"/>
+          <a:stretch>
+            <a:fillRect/>
+          </a:stretch>
+        </p:blipFill>
+        <p:spPr>
+          <a:xfrm>
+            <a:off x="1799980" y="2192778"/>
+            <a:ext cx="6827882" cy="253794"/>
+          </a:xfrm>
+          <a:prstGeom prst="rect">
+            <a:avLst/>
+          </a:prstGeom>
         </p:spPr>
       </p:pic>
     </p:spTree>

--- a/2026_М_ПІ_ІПЗм_24_1_Суботін_В_А.pptx
+++ b/2026_М_ПІ_ІПЗм_24_1_Суботін_В_А.pptx
@@ -8450,59 +8450,43 @@
               </a:rPr>
             </a:br>
             <a:r>
-              <a:rPr lang="ru-RU" sz="2400" dirty="0" err="1">
-                <a:latin typeface="Times New Roman" panose="02020603050405020304" pitchFamily="18" charset="0"/>
-                <a:cs typeface="Times New Roman" panose="02020603050405020304" pitchFamily="18" charset="0"/>
-              </a:rPr>
+              <a:rPr lang="ru-RU" sz="2400" dirty="0" err="1"/>
               <a:t>Дослідження</a:t>
             </a:r>
             <a:r>
-              <a:rPr lang="ru-RU" sz="2400" dirty="0">
-                <a:latin typeface="Times New Roman" panose="02020603050405020304" pitchFamily="18" charset="0"/>
-                <a:cs typeface="Times New Roman" panose="02020603050405020304" pitchFamily="18" charset="0"/>
-              </a:rPr>
+              <a:rPr lang="ru-RU" sz="2400" dirty="0"/>
               <a:t> </a:t>
             </a:r>
             <a:r>
-              <a:rPr lang="ru-RU" sz="2400" dirty="0" err="1">
-                <a:latin typeface="Times New Roman" panose="02020603050405020304" pitchFamily="18" charset="0"/>
-                <a:cs typeface="Times New Roman" panose="02020603050405020304" pitchFamily="18" charset="0"/>
-              </a:rPr>
+              <a:rPr lang="ru-RU" sz="2400" dirty="0" err="1"/>
               <a:t>трансформерних</a:t>
             </a:r>
             <a:r>
-              <a:rPr lang="ru-RU" sz="2400" dirty="0">
-                <a:latin typeface="Times New Roman" panose="02020603050405020304" pitchFamily="18" charset="0"/>
-                <a:cs typeface="Times New Roman" panose="02020603050405020304" pitchFamily="18" charset="0"/>
-              </a:rPr>
-              <a:t> моделей у </a:t>
-            </a:r>
-            <a:r>
-              <a:rPr lang="ru-RU" sz="2400" dirty="0" err="1">
-                <a:latin typeface="Times New Roman" panose="02020603050405020304" pitchFamily="18" charset="0"/>
-                <a:cs typeface="Times New Roman" panose="02020603050405020304" pitchFamily="18" charset="0"/>
-              </a:rPr>
+              <a:rPr lang="ru-RU" sz="2400" dirty="0"/>
+              <a:t> моделей машинного </a:t>
+            </a:r>
+            <a:r>
+              <a:rPr lang="ru-RU" sz="2400" dirty="0" err="1"/>
+              <a:t>навчання</a:t>
+            </a:r>
+            <a:r>
+              <a:rPr lang="ru-RU" sz="2400" dirty="0"/>
+              <a:t> у </a:t>
+            </a:r>
+            <a:r>
+              <a:rPr lang="ru-RU" sz="2400" dirty="0" err="1"/>
               <a:t>секвенційних</a:t>
             </a:r>
             <a:r>
-              <a:rPr lang="ru-RU" sz="2400" dirty="0">
-                <a:latin typeface="Times New Roman" panose="02020603050405020304" pitchFamily="18" charset="0"/>
-                <a:cs typeface="Times New Roman" panose="02020603050405020304" pitchFamily="18" charset="0"/>
-              </a:rPr>
+              <a:rPr lang="ru-RU" sz="2400" dirty="0"/>
               <a:t> </a:t>
             </a:r>
             <a:r>
-              <a:rPr lang="ru-RU" sz="2400" dirty="0" err="1">
-                <a:latin typeface="Times New Roman" panose="02020603050405020304" pitchFamily="18" charset="0"/>
-                <a:cs typeface="Times New Roman" panose="02020603050405020304" pitchFamily="18" charset="0"/>
-              </a:rPr>
+              <a:rPr lang="ru-RU" sz="2400" dirty="0" err="1"/>
               <a:t>рекомендаційних</a:t>
             </a:r>
             <a:r>
-              <a:rPr lang="ru-RU" sz="2400">
-                <a:latin typeface="Times New Roman" panose="02020603050405020304" pitchFamily="18" charset="0"/>
-                <a:cs typeface="Times New Roman" panose="02020603050405020304" pitchFamily="18" charset="0"/>
-              </a:rPr>
+              <a:rPr lang="ru-RU" sz="2400"/>
               <a:t> системах</a:t>
             </a:r>
             <a:endParaRPr sz="2400" dirty="0">
